--- a/환경경제학/2026-1/환경경제학_Chapter_07 (Section2부터).pptx
+++ b/환경경제학/2026-1/환경경제학_Chapter_07 (Section2부터).pptx
@@ -235,7 +235,7 @@
           <a:p>
             <a:fld id="{4A5E00EF-AEA4-43E2-9451-8F9C59A39471}" type="datetimeFigureOut">
               <a:rPr lang="ko-KR" altLang="en-US" smtClean="0"/>
-              <a:t>2026-09-30</a:t>
+              <a:t>2026-10-07</a:t>
             </a:fld>
             <a:endParaRPr lang="ko-KR" altLang="en-US"/>
           </a:p>
@@ -849,7 +849,7 @@
           <a:p>
             <a:fld id="{CD32C56F-BD27-4999-9E6D-D4EACE3DA9F4}" type="datetime1">
               <a:rPr lang="ko-KR" altLang="en-US" smtClean="0"/>
-              <a:t>2026-09-30</a:t>
+              <a:t>2026-10-07</a:t>
             </a:fld>
             <a:endParaRPr lang="ko-KR" altLang="en-US"/>
           </a:p>
@@ -1063,7 +1063,7 @@
           <a:p>
             <a:fld id="{8EF4A19C-72C8-45CA-8E3F-68A7FA345D6C}" type="datetime1">
               <a:rPr lang="ko-KR" altLang="en-US" smtClean="0"/>
-              <a:t>2026-09-30</a:t>
+              <a:t>2026-10-07</a:t>
             </a:fld>
             <a:endParaRPr lang="ko-KR" altLang="en-US"/>
           </a:p>
@@ -1287,7 +1287,7 @@
           <a:p>
             <a:fld id="{56A175B2-010B-4341-954C-5F8F5C70B124}" type="datetime1">
               <a:rPr lang="ko-KR" altLang="en-US" smtClean="0"/>
-              <a:t>2026-09-30</a:t>
+              <a:t>2026-10-07</a:t>
             </a:fld>
             <a:endParaRPr lang="ko-KR" altLang="en-US"/>
           </a:p>
@@ -1501,7 +1501,7 @@
           <a:p>
             <a:fld id="{16B83F9E-22C9-45CA-9E85-070F1D3EF530}" type="datetime1">
               <a:rPr lang="ko-KR" altLang="en-US" smtClean="0"/>
-              <a:t>2026-09-30</a:t>
+              <a:t>2026-10-07</a:t>
             </a:fld>
             <a:endParaRPr lang="ko-KR" altLang="en-US"/>
           </a:p>
@@ -1792,7 +1792,7 @@
           <a:p>
             <a:fld id="{03278F45-FB3C-4C4D-B89A-7BC3F5F229F6}" type="datetime1">
               <a:rPr lang="ko-KR" altLang="en-US" smtClean="0"/>
-              <a:t>2026-09-30</a:t>
+              <a:t>2026-10-07</a:t>
             </a:fld>
             <a:endParaRPr lang="ko-KR" altLang="en-US"/>
           </a:p>
@@ -2185,7 +2185,7 @@
           <a:p>
             <a:fld id="{38FDAC3C-35A6-415C-9F03-738A6AC328B1}" type="datetime1">
               <a:rPr lang="ko-KR" altLang="en-US" smtClean="0"/>
-              <a:t>2026-09-30</a:t>
+              <a:t>2026-10-07</a:t>
             </a:fld>
             <a:endParaRPr lang="ko-KR" altLang="en-US"/>
           </a:p>
@@ -3779,7 +3779,7 @@
           <a:p>
             <a:fld id="{507A0DF1-AEE6-4B0D-89D2-351E7B3EF65C}" type="datetime1">
               <a:rPr lang="ko-KR" altLang="en-US" smtClean="0"/>
-              <a:t>2026-09-30</a:t>
+              <a:t>2026-10-07</a:t>
             </a:fld>
             <a:endParaRPr lang="ko-KR" altLang="en-US"/>
           </a:p>
@@ -4207,7 +4207,7 @@
           <a:p>
             <a:fld id="{CA93B8C9-630F-4D57-944D-04FD37CECCD3}" type="datetime1">
               <a:rPr lang="ko-KR" altLang="en-US" smtClean="0"/>
-              <a:t>2026-09-30</a:t>
+              <a:t>2026-10-07</a:t>
             </a:fld>
             <a:endParaRPr lang="ko-KR" altLang="en-US"/>
           </a:p>
@@ -4364,7 +4364,7 @@
           <a:p>
             <a:fld id="{E986165A-AC43-4902-9541-874ECD310BA3}" type="datetime1">
               <a:rPr lang="ko-KR" altLang="en-US" smtClean="0"/>
-              <a:t>2026-09-30</a:t>
+              <a:t>2026-10-07</a:t>
             </a:fld>
             <a:endParaRPr lang="ko-KR" altLang="en-US"/>
           </a:p>
@@ -4691,7 +4691,7 @@
           <a:p>
             <a:fld id="{47E6EE6D-2B0E-43A9-87A2-7354CDB998F4}" type="datetime1">
               <a:rPr lang="ko-KR" altLang="en-US" smtClean="0"/>
-              <a:t>2026-09-30</a:t>
+              <a:t>2026-10-07</a:t>
             </a:fld>
             <a:endParaRPr lang="ko-KR" altLang="en-US"/>
           </a:p>
@@ -4995,7 +4995,7 @@
           <a:p>
             <a:fld id="{5CC5944E-0BC8-4FAA-9F94-6B4B05834E10}" type="datetime1">
               <a:rPr lang="ko-KR" altLang="en-US" smtClean="0"/>
-              <a:t>2026-09-30</a:t>
+              <a:t>2026-10-07</a:t>
             </a:fld>
             <a:endParaRPr lang="ko-KR" altLang="en-US"/>
           </a:p>
@@ -7515,8 +7515,8 @@
           </a:p>
         </p:txBody>
       </p:sp>
-      <mc:AlternateContent xmlns:mc="http://schemas.openxmlformats.org/markup-compatibility/2006">
-        <mc:Choice xmlns:a14="http://schemas.microsoft.com/office/drawing/2010/main" Requires="a14">
+      <mc:AlternateContent xmlns:mc="http://schemas.openxmlformats.org/markup-compatibility/2006" xmlns:a14="http://schemas.microsoft.com/office/drawing/2010/main">
+        <mc:Choice Requires="a14">
           <p:sp>
             <p:nvSpPr>
               <p:cNvPr id="16" name="TextBox 15">
@@ -7965,7 +7965,7 @@
             </p:txBody>
           </p:sp>
         </mc:Choice>
-        <mc:Fallback>
+        <mc:Fallback xmlns="">
           <p:sp>
             <p:nvSpPr>
               <p:cNvPr id="16" name="TextBox 15">
@@ -8446,9 +8446,12 @@
             </a:pPr>
             <a:r>
               <a:rPr lang="ko-KR" altLang="en-US" sz="1600" spc="-50" dirty="0"/>
-              <a:t>배출부과금제도의 장점을 가지고 있음과 동시에 집행비용을 절약할 수 있는 정책수단</a:t>
-            </a:r>
-            <a:endParaRPr lang="en-US" altLang="ko-KR" sz="1600" spc="-50" dirty="0"/>
+              <a:t>아래의 정책은 배출부과금제도의 장점을 가지고 있음과 동시에 집행비용을 절약할 수 있는 정책수단이다</a:t>
+            </a:r>
+            <a:r>
+              <a:rPr lang="en-US" altLang="ko-KR" sz="1600" spc="-50" dirty="0"/>
+              <a:t>.</a:t>
+            </a:r>
           </a:p>
           <a:p>
             <a:pPr marL="835025" lvl="1" indent="-285750">
@@ -8553,8 +8556,8 @@
         </p:blipFill>
         <p:spPr bwMode="auto">
           <a:xfrm>
-            <a:off x="8667750" y="2927350"/>
-            <a:ext cx="3213100" cy="1927388"/>
+            <a:off x="8439325" y="2927349"/>
+            <a:ext cx="3441525" cy="2064409"/>
           </a:xfrm>
           <a:prstGeom prst="rect">
             <a:avLst/>
@@ -8674,7 +8677,7 @@
             </p:nvSpPr>
             <p:spPr>
               <a:xfrm>
-                <a:off x="678873" y="958844"/>
+                <a:off x="351708" y="958844"/>
                 <a:ext cx="8251767" cy="5584670"/>
               </a:xfrm>
               <a:prstGeom prst="rect">
@@ -9259,7 +9262,7 @@
             </p:nvSpPr>
             <p:spPr>
               <a:xfrm>
-                <a:off x="678873" y="958844"/>
+                <a:off x="351708" y="958844"/>
                 <a:ext cx="8251767" cy="5584670"/>
               </a:xfrm>
               <a:prstGeom prst="rect">
@@ -9268,7 +9271,7 @@
               <a:blipFill>
                 <a:blip r:embed="rId3"/>
                 <a:stretch>
-                  <a:fillRect r="-295" b="-437"/>
+                  <a:fillRect r="-296" b="-437"/>
                 </a:stretch>
               </a:blipFill>
             </p:spPr>
@@ -9457,7 +9460,7 @@
         <p:spPr>
           <a:xfrm>
             <a:off x="678873" y="958844"/>
-            <a:ext cx="10788965" cy="5584670"/>
+            <a:ext cx="10788965" cy="5215338"/>
           </a:xfrm>
           <a:prstGeom prst="rect">
             <a:avLst/>
@@ -9527,9 +9530,12 @@
             </a:r>
             <a:r>
               <a:rPr lang="ko-KR" altLang="en-US" sz="1600" spc="-50" dirty="0"/>
-              <a:t>생태계다양성 지지 등과 같이 긍정적인 외부효과를 주기도 함</a:t>
-            </a:r>
-            <a:endParaRPr lang="en-US" altLang="ko-KR" sz="1600" spc="-50" dirty="0"/>
+              <a:t>생태계다양성 지지 등과 같이 긍정적인 외부효과를 주기도 한다</a:t>
+            </a:r>
+            <a:r>
+              <a:rPr lang="en-US" altLang="ko-KR" sz="1600" spc="-50" dirty="0"/>
+              <a:t>.</a:t>
+            </a:r>
           </a:p>
           <a:p>
             <a:pPr marL="377825" indent="-285750">
@@ -9549,9 +9555,12 @@
             </a:r>
             <a:r>
               <a:rPr lang="ko-KR" altLang="en-US" sz="1600" spc="-50" dirty="0"/>
-              <a:t>위와 같이 긍정적 외부효과를 갖고 있는 자국의 농업이 위축되는 것을 우려</a:t>
-            </a:r>
-            <a:endParaRPr lang="en-US" altLang="ko-KR" sz="1600" spc="-50" dirty="0"/>
+              <a:t>위와 같이 긍정적 외부효과를 갖고 있는 자국의 농업이 위축되는 것을 우려하고 있다</a:t>
+            </a:r>
+            <a:r>
+              <a:rPr lang="en-US" altLang="ko-KR" sz="1600" spc="-50" dirty="0"/>
+              <a:t>.</a:t>
+            </a:r>
           </a:p>
           <a:p>
             <a:pPr marL="377825" indent="-285750">
@@ -9571,9 +9580,12 @@
             </a:r>
             <a:r>
               <a:rPr lang="ko-KR" altLang="en-US" sz="1600" spc="-50" dirty="0"/>
-              <a:t>호주와 같은 농산물 수출국들은 위에 설명한 농업의 긍정적 외부효과를 강조하는 것은 무역장벽을 설치하기 위한 변명에 불과하다는 입장</a:t>
-            </a:r>
-            <a:endParaRPr lang="en-US" altLang="ko-KR" sz="1600" spc="-50" dirty="0"/>
+              <a:t>호주와 같은 농산물 수출국들은 위에 설명한 농업의 긍정적 외부효과를 강조하는 것은 무역장벽을 설치하기 위한 변명에 불과하다는 입장이다</a:t>
+            </a:r>
+            <a:r>
+              <a:rPr lang="en-US" altLang="ko-KR" sz="1600" spc="-50" dirty="0"/>
+              <a:t>.</a:t>
+            </a:r>
           </a:p>
           <a:p>
             <a:pPr marL="377825" indent="-285750">
@@ -9652,9 +9664,12 @@
             </a:r>
             <a:r>
               <a:rPr lang="ko-KR" altLang="en-US" sz="1600" spc="-50" dirty="0"/>
-              <a:t>농산물가격을 적절히 높여 줌으로써 보상해주는 것이 바람직하다는 주장도 있음</a:t>
-            </a:r>
-            <a:endParaRPr lang="en-US" altLang="ko-KR" sz="1600" spc="-50" dirty="0"/>
+              <a:t>농산물가격을 적절히 높여 줌으로써 보상해주는 것이 바람직하다는 주장도 있다</a:t>
+            </a:r>
+            <a:r>
+              <a:rPr lang="en-US" altLang="ko-KR" sz="1600" spc="-50" dirty="0"/>
+              <a:t>.</a:t>
+            </a:r>
           </a:p>
           <a:p>
             <a:pPr marL="835025" lvl="1" indent="-285750">
@@ -9674,18 +9689,12 @@
             </a:r>
             <a:r>
               <a:rPr lang="ko-KR" altLang="en-US" sz="1600" spc="-50" dirty="0"/>
-              <a:t>제품부과금 논쟁과 유사한 맥락임</a:t>
-            </a:r>
-            <a:endParaRPr lang="en-US" altLang="ko-KR" sz="1600" spc="-50" dirty="0"/>
-          </a:p>
-          <a:p>
-            <a:pPr marL="377825" indent="-285750">
-              <a:lnSpc>
-                <a:spcPct val="150000"/>
-              </a:lnSpc>
-              <a:buFont typeface="Arial" panose="020B0604020202020204" pitchFamily="34" charset="0"/>
-              <a:buChar char="•"/>
-            </a:pPr>
+              <a:t>제품부과금 논쟁과 유사한 맥락으로 볼 수 있다</a:t>
+            </a:r>
+            <a:r>
+              <a:rPr lang="en-US" altLang="ko-KR" sz="1600" spc="-50"/>
+              <a:t>.</a:t>
+            </a:r>
             <a:endParaRPr lang="en-US" altLang="ko-KR" sz="1600" spc="-50" dirty="0"/>
           </a:p>
         </p:txBody>
@@ -9783,8 +9792,8 @@
           </a:p>
         </p:txBody>
       </p:sp>
-      <mc:AlternateContent xmlns:mc="http://schemas.openxmlformats.org/markup-compatibility/2006">
-        <mc:Choice xmlns:a14="http://schemas.microsoft.com/office/drawing/2010/main" Requires="a14">
+      <mc:AlternateContent xmlns:mc="http://schemas.openxmlformats.org/markup-compatibility/2006" xmlns:a14="http://schemas.microsoft.com/office/drawing/2010/main">
+        <mc:Choice Requires="a14">
           <p:sp>
             <p:nvSpPr>
               <p:cNvPr id="6" name="TextBox 5">
@@ -10315,7 +10324,7 @@
             </p:txBody>
           </p:sp>
         </mc:Choice>
-        <mc:Fallback>
+        <mc:Fallback xmlns="">
           <p:sp>
             <p:nvSpPr>
               <p:cNvPr id="6" name="TextBox 5">
@@ -10753,36 +10762,6 @@
           </a:p>
         </p:txBody>
       </p:sp>
-      <p:pic>
-        <p:nvPicPr>
-          <p:cNvPr id="5" name="그림 4" descr="텍스트, 라인, 도표, 평행이(가) 표시된 사진&#10;&#10;AI 생성 콘텐츠는 정확하지 않을 수 있습니다.">
-            <a:extLst>
-              <a:ext uri="{FF2B5EF4-FFF2-40B4-BE49-F238E27FC236}">
-                <a16:creationId xmlns:a16="http://schemas.microsoft.com/office/drawing/2014/main" id="{0DCB0DEB-81C1-3522-F5D7-ADA9A1C45DEB}"/>
-              </a:ext>
-            </a:extLst>
-          </p:cNvPr>
-          <p:cNvPicPr>
-            <a:picLocks noChangeAspect="1"/>
-          </p:cNvPicPr>
-          <p:nvPr/>
-        </p:nvPicPr>
-        <p:blipFill>
-          <a:blip r:embed="rId3"/>
-          <a:stretch>
-            <a:fillRect/>
-          </a:stretch>
-        </p:blipFill>
-        <p:spPr>
-          <a:xfrm>
-            <a:off x="7197771" y="1134532"/>
-            <a:ext cx="4784679" cy="5477367"/>
-          </a:xfrm>
-          <a:prstGeom prst="rect">
-            <a:avLst/>
-          </a:prstGeom>
-        </p:spPr>
-      </p:pic>
       <mc:AlternateContent xmlns:mc="http://schemas.openxmlformats.org/markup-compatibility/2006" xmlns:a14="http://schemas.microsoft.com/office/drawing/2010/main">
         <mc:Choice Requires="a14">
           <p:sp>
@@ -11379,6 +11358,111 @@
           </p:sp>
         </mc:Fallback>
       </mc:AlternateContent>
+      <p:pic>
+        <p:nvPicPr>
+          <p:cNvPr id="6" name="그림 7" descr="Cap 2014-06-19 09-44-15-042.png">
+            <a:extLst>
+              <a:ext uri="{FF2B5EF4-FFF2-40B4-BE49-F238E27FC236}">
+                <a16:creationId xmlns:a16="http://schemas.microsoft.com/office/drawing/2014/main" id="{FAFE12DB-6B11-83A2-90D3-E17D0128F8D8}"/>
+              </a:ext>
+            </a:extLst>
+          </p:cNvPr>
+          <p:cNvPicPr>
+            <a:picLocks noChangeAspect="1"/>
+          </p:cNvPicPr>
+          <p:nvPr/>
+        </p:nvPicPr>
+        <p:blipFill rotWithShape="1">
+          <a:blip r:embed="rId5">
+            <a:extLst>
+              <a:ext uri="{28A0092B-C50C-407E-A947-70E740481C1C}">
+                <a14:useLocalDpi xmlns:a14="http://schemas.microsoft.com/office/drawing/2010/main" val="0"/>
+              </a:ext>
+            </a:extLst>
+          </a:blip>
+          <a:srcRect l="7158" t="11638" r="7717" b="1758"/>
+          <a:stretch>
+            <a:fillRect/>
+          </a:stretch>
+        </p:blipFill>
+        <p:spPr bwMode="auto">
+          <a:xfrm>
+            <a:off x="7478553" y="2787416"/>
+            <a:ext cx="4301306" cy="2417952"/>
+          </a:xfrm>
+          <a:prstGeom prst="rect">
+            <a:avLst/>
+          </a:prstGeom>
+          <a:noFill/>
+          <a:ln>
+            <a:noFill/>
+          </a:ln>
+          <a:extLst>
+            <a:ext uri="{909E8E84-426E-40DD-AFC4-6F175D3DCCD1}">
+              <a14:hiddenFill xmlns:a14="http://schemas.microsoft.com/office/drawing/2010/main">
+                <a:solidFill>
+                  <a:srgbClr val="FFFFFF"/>
+                </a:solidFill>
+              </a14:hiddenFill>
+            </a:ext>
+            <a:ext uri="{91240B29-F687-4F45-9708-019B960494DF}">
+              <a14:hiddenLine xmlns:a14="http://schemas.microsoft.com/office/drawing/2010/main" w="9525">
+                <a:solidFill>
+                  <a:srgbClr val="000000"/>
+                </a:solidFill>
+                <a:miter lim="800000"/>
+                <a:headEnd/>
+                <a:tailEnd/>
+              </a14:hiddenLine>
+            </a:ext>
+          </a:extLst>
+        </p:spPr>
+      </p:pic>
+      <p:sp>
+        <p:nvSpPr>
+          <p:cNvPr id="9" name="TextBox 8">
+            <a:extLst>
+              <a:ext uri="{FF2B5EF4-FFF2-40B4-BE49-F238E27FC236}">
+                <a16:creationId xmlns:a16="http://schemas.microsoft.com/office/drawing/2014/main" id="{B0B22B5F-08A4-9CF5-8809-1787DA1B3147}"/>
+              </a:ext>
+            </a:extLst>
+          </p:cNvPr>
+          <p:cNvSpPr txBox="1"/>
+          <p:nvPr/>
+        </p:nvSpPr>
+        <p:spPr>
+          <a:xfrm>
+            <a:off x="8153400" y="2364601"/>
+            <a:ext cx="3242052" cy="276999"/>
+          </a:xfrm>
+          <a:prstGeom prst="rect">
+            <a:avLst/>
+          </a:prstGeom>
+          <a:noFill/>
+        </p:spPr>
+        <p:txBody>
+          <a:bodyPr wrap="square">
+            <a:spAutoFit/>
+          </a:bodyPr>
+          <a:lstStyle/>
+          <a:p>
+            <a:pPr algn="ctr"/>
+            <a:r>
+              <a:rPr lang="en-US" altLang="ko-KR" sz="1200" spc="-50" dirty="0"/>
+              <a:t>&lt;</a:t>
+            </a:r>
+            <a:r>
+              <a:rPr lang="ko-KR" altLang="en-US" sz="1200" spc="-50" dirty="0"/>
+              <a:t>저감시설에 대한 보조금</a:t>
+            </a:r>
+            <a:r>
+              <a:rPr lang="en-US" altLang="ko-KR" sz="1200" spc="-50" dirty="0"/>
+              <a:t>&gt;</a:t>
+            </a:r>
+            <a:endParaRPr lang="ko-KR" altLang="en-US" sz="1400" dirty="0"/>
+          </a:p>
+        </p:txBody>
+      </p:sp>
     </p:spTree>
     <p:extLst>
       <p:ext uri="{BB962C8B-B14F-4D97-AF65-F5344CB8AC3E}">
@@ -11415,6 +11499,66 @@
           <a:chExt cx="0" cy="0"/>
         </a:xfrm>
       </p:grpSpPr>
+      <p:pic>
+        <p:nvPicPr>
+          <p:cNvPr id="5" name="그림 7" descr="Cap 2014-06-19 09-44-24-368.png">
+            <a:extLst>
+              <a:ext uri="{FF2B5EF4-FFF2-40B4-BE49-F238E27FC236}">
+                <a16:creationId xmlns:a16="http://schemas.microsoft.com/office/drawing/2014/main" id="{4570CD8F-A3E5-67E2-4BA7-D5165CC89E22}"/>
+              </a:ext>
+            </a:extLst>
+          </p:cNvPr>
+          <p:cNvPicPr>
+            <a:picLocks noChangeAspect="1"/>
+          </p:cNvPicPr>
+          <p:nvPr/>
+        </p:nvPicPr>
+        <p:blipFill rotWithShape="1">
+          <a:blip r:embed="rId3">
+            <a:extLst>
+              <a:ext uri="{28A0092B-C50C-407E-A947-70E740481C1C}">
+                <a14:useLocalDpi xmlns:a14="http://schemas.microsoft.com/office/drawing/2010/main" val="0"/>
+              </a:ext>
+            </a:extLst>
+          </a:blip>
+          <a:srcRect l="13333" t="13569" r="13828"/>
+          <a:stretch>
+            <a:fillRect/>
+          </a:stretch>
+        </p:blipFill>
+        <p:spPr bwMode="auto">
+          <a:xfrm>
+            <a:off x="7098896" y="2467995"/>
+            <a:ext cx="4834444" cy="3017618"/>
+          </a:xfrm>
+          <a:prstGeom prst="rect">
+            <a:avLst/>
+          </a:prstGeom>
+          <a:noFill/>
+          <a:ln>
+            <a:noFill/>
+          </a:ln>
+          <a:extLst>
+            <a:ext uri="{909E8E84-426E-40DD-AFC4-6F175D3DCCD1}">
+              <a14:hiddenFill xmlns:a14="http://schemas.microsoft.com/office/drawing/2010/main">
+                <a:solidFill>
+                  <a:srgbClr val="FFFFFF"/>
+                </a:solidFill>
+              </a14:hiddenFill>
+            </a:ext>
+            <a:ext uri="{91240B29-F687-4F45-9708-019B960494DF}">
+              <a14:hiddenLine xmlns:a14="http://schemas.microsoft.com/office/drawing/2010/main" w="9525">
+                <a:solidFill>
+                  <a:srgbClr val="000000"/>
+                </a:solidFill>
+                <a:miter lim="800000"/>
+                <a:headEnd/>
+                <a:tailEnd/>
+              </a14:hiddenLine>
+            </a:ext>
+          </a:extLst>
+        </p:spPr>
+      </p:pic>
       <p:sp>
         <p:nvSpPr>
           <p:cNvPr id="2" name="제목 1">
@@ -11893,7 +12037,7 @@
                 <a:avLst/>
               </a:prstGeom>
               <a:blipFill>
-                <a:blip r:embed="rId3"/>
+                <a:blip r:embed="rId4"/>
                 <a:stretch>
                   <a:fillRect l="-433" r="-173" b="-629"/>
                 </a:stretch>
@@ -11914,36 +12058,51 @@
           </p:sp>
         </mc:Fallback>
       </mc:AlternateContent>
-      <p:pic>
-        <p:nvPicPr>
-          <p:cNvPr id="12" name="그림 11" descr="텍스트, 도표, 라인, 그래프이(가) 표시된 사진&#10;&#10;AI 생성 콘텐츠는 정확하지 않을 수 있습니다.">
+      <p:sp>
+        <p:nvSpPr>
+          <p:cNvPr id="8" name="TextBox 7">
             <a:extLst>
               <a:ext uri="{FF2B5EF4-FFF2-40B4-BE49-F238E27FC236}">
-                <a16:creationId xmlns:a16="http://schemas.microsoft.com/office/drawing/2014/main" id="{85C08F19-F65E-7BDA-11FD-67F085EB0C3C}"/>
+                <a16:creationId xmlns:a16="http://schemas.microsoft.com/office/drawing/2014/main" id="{6BC15EA9-029C-CA93-4AC2-C95972E03782}"/>
               </a:ext>
             </a:extLst>
           </p:cNvPr>
-          <p:cNvPicPr>
-            <a:picLocks noChangeAspect="1"/>
-          </p:cNvPicPr>
+          <p:cNvSpPr txBox="1"/>
           <p:nvPr/>
-        </p:nvPicPr>
-        <p:blipFill>
-          <a:blip r:embed="rId4"/>
-          <a:stretch>
-            <a:fillRect/>
-          </a:stretch>
-        </p:blipFill>
+        </p:nvSpPr>
         <p:spPr>
           <a:xfrm>
-            <a:off x="7374466" y="958844"/>
-            <a:ext cx="4611318" cy="5278908"/>
+            <a:off x="8153400" y="2364601"/>
+            <a:ext cx="2211198" cy="276999"/>
           </a:xfrm>
           <a:prstGeom prst="rect">
             <a:avLst/>
           </a:prstGeom>
+          <a:noFill/>
         </p:spPr>
-      </p:pic>
+        <p:txBody>
+          <a:bodyPr wrap="square">
+            <a:spAutoFit/>
+          </a:bodyPr>
+          <a:lstStyle/>
+          <a:p>
+            <a:pPr algn="ctr"/>
+            <a:r>
+              <a:rPr lang="en-US" altLang="ko-KR" sz="1200" spc="-50"/>
+              <a:t>&lt;</a:t>
+            </a:r>
+            <a:r>
+              <a:rPr lang="ko-KR" altLang="en-US" sz="1200" spc="-50" dirty="0"/>
+              <a:t>저감 보조금</a:t>
+            </a:r>
+            <a:r>
+              <a:rPr lang="en-US" altLang="ko-KR" sz="1200" spc="-50" dirty="0"/>
+              <a:t>&gt;</a:t>
+            </a:r>
+            <a:endParaRPr lang="ko-KR" altLang="en-US" sz="1400" dirty="0"/>
+          </a:p>
+        </p:txBody>
+      </p:sp>
     </p:spTree>
     <p:extLst>
       <p:ext uri="{BB962C8B-B14F-4D97-AF65-F5344CB8AC3E}">
@@ -12393,6 +12552,66 @@
           <a:chExt cx="0" cy="0"/>
         </a:xfrm>
       </p:grpSpPr>
+      <p:pic>
+        <p:nvPicPr>
+          <p:cNvPr id="7" name="그림 7" descr="Cap 2014-06-19 09-44-24-368.png">
+            <a:extLst>
+              <a:ext uri="{FF2B5EF4-FFF2-40B4-BE49-F238E27FC236}">
+                <a16:creationId xmlns:a16="http://schemas.microsoft.com/office/drawing/2014/main" id="{41855237-564D-1255-DBC2-74FBF4097F2D}"/>
+              </a:ext>
+            </a:extLst>
+          </p:cNvPr>
+          <p:cNvPicPr>
+            <a:picLocks noChangeAspect="1"/>
+          </p:cNvPicPr>
+          <p:nvPr/>
+        </p:nvPicPr>
+        <p:blipFill rotWithShape="1">
+          <a:blip r:embed="rId2">
+            <a:extLst>
+              <a:ext uri="{28A0092B-C50C-407E-A947-70E740481C1C}">
+                <a14:useLocalDpi xmlns:a14="http://schemas.microsoft.com/office/drawing/2010/main" val="0"/>
+              </a:ext>
+            </a:extLst>
+          </a:blip>
+          <a:srcRect l="13333" t="13569" r="13828"/>
+          <a:stretch>
+            <a:fillRect/>
+          </a:stretch>
+        </p:blipFill>
+        <p:spPr bwMode="auto">
+          <a:xfrm>
+            <a:off x="7098896" y="2467995"/>
+            <a:ext cx="4834444" cy="3017618"/>
+          </a:xfrm>
+          <a:prstGeom prst="rect">
+            <a:avLst/>
+          </a:prstGeom>
+          <a:noFill/>
+          <a:ln>
+            <a:noFill/>
+          </a:ln>
+          <a:extLst>
+            <a:ext uri="{909E8E84-426E-40DD-AFC4-6F175D3DCCD1}">
+              <a14:hiddenFill xmlns:a14="http://schemas.microsoft.com/office/drawing/2010/main">
+                <a:solidFill>
+                  <a:srgbClr val="FFFFFF"/>
+                </a:solidFill>
+              </a14:hiddenFill>
+            </a:ext>
+            <a:ext uri="{91240B29-F687-4F45-9708-019B960494DF}">
+              <a14:hiddenLine xmlns:a14="http://schemas.microsoft.com/office/drawing/2010/main" w="9525">
+                <a:solidFill>
+                  <a:srgbClr val="000000"/>
+                </a:solidFill>
+                <a:miter lim="800000"/>
+                <a:headEnd/>
+                <a:tailEnd/>
+              </a14:hiddenLine>
+            </a:ext>
+          </a:extLst>
+        </p:spPr>
+      </p:pic>
       <p:sp>
         <p:nvSpPr>
           <p:cNvPr id="2" name="제목 1">
@@ -12984,7 +13203,7 @@
                 <a:avLst/>
               </a:prstGeom>
               <a:blipFill>
-                <a:blip r:embed="rId2"/>
+                <a:blip r:embed="rId3"/>
                 <a:stretch>
                   <a:fillRect l="-460" b="-881"/>
                 </a:stretch>
@@ -13005,36 +13224,51 @@
           </p:sp>
         </mc:Fallback>
       </mc:AlternateContent>
-      <p:pic>
-        <p:nvPicPr>
-          <p:cNvPr id="3" name="그림 2" descr="텍스트, 도표, 라인, 그래프이(가) 표시된 사진&#10;&#10;AI 생성 콘텐츠는 정확하지 않을 수 있습니다.">
+      <p:sp>
+        <p:nvSpPr>
+          <p:cNvPr id="9" name="TextBox 8">
             <a:extLst>
               <a:ext uri="{FF2B5EF4-FFF2-40B4-BE49-F238E27FC236}">
-                <a16:creationId xmlns:a16="http://schemas.microsoft.com/office/drawing/2014/main" id="{67F5859C-0BB6-4FF9-2093-8C8D646AA23B}"/>
+                <a16:creationId xmlns:a16="http://schemas.microsoft.com/office/drawing/2014/main" id="{CF537349-A1FD-428B-E31D-D4186B55A02F}"/>
               </a:ext>
             </a:extLst>
           </p:cNvPr>
-          <p:cNvPicPr>
-            <a:picLocks noChangeAspect="1"/>
-          </p:cNvPicPr>
+          <p:cNvSpPr txBox="1"/>
           <p:nvPr/>
-        </p:nvPicPr>
-        <p:blipFill>
-          <a:blip r:embed="rId3"/>
-          <a:stretch>
-            <a:fillRect/>
-          </a:stretch>
-        </p:blipFill>
+        </p:nvSpPr>
         <p:spPr>
           <a:xfrm>
-            <a:off x="7374466" y="958844"/>
-            <a:ext cx="4611318" cy="5278908"/>
+            <a:off x="8153400" y="2364601"/>
+            <a:ext cx="2211198" cy="276999"/>
           </a:xfrm>
           <a:prstGeom prst="rect">
             <a:avLst/>
           </a:prstGeom>
+          <a:noFill/>
         </p:spPr>
-      </p:pic>
+        <p:txBody>
+          <a:bodyPr wrap="square">
+            <a:spAutoFit/>
+          </a:bodyPr>
+          <a:lstStyle/>
+          <a:p>
+            <a:pPr algn="ctr"/>
+            <a:r>
+              <a:rPr lang="en-US" altLang="ko-KR" sz="1200" spc="-50"/>
+              <a:t>&lt;</a:t>
+            </a:r>
+            <a:r>
+              <a:rPr lang="ko-KR" altLang="en-US" sz="1200" spc="-50" dirty="0"/>
+              <a:t>저감 보조금</a:t>
+            </a:r>
+            <a:r>
+              <a:rPr lang="en-US" altLang="ko-KR" sz="1200" spc="-50" dirty="0"/>
+              <a:t>&gt;</a:t>
+            </a:r>
+            <a:endParaRPr lang="ko-KR" altLang="en-US" sz="1400" dirty="0"/>
+          </a:p>
+        </p:txBody>
+      </p:sp>
     </p:spTree>
     <p:extLst>
       <p:ext uri="{BB962C8B-B14F-4D97-AF65-F5344CB8AC3E}">
@@ -14373,10 +14607,10 @@
       </p:grpSpPr>
       <p:pic>
         <p:nvPicPr>
-          <p:cNvPr id="6" name="그림 5" descr="텍스트, 라인, 도표, 그래프이(가) 표시된 사진&#10;&#10;AI 생성 콘텐츠는 정확하지 않을 수 있습니다.">
+          <p:cNvPr id="16" name="그림 15">
             <a:extLst>
               <a:ext uri="{FF2B5EF4-FFF2-40B4-BE49-F238E27FC236}">
-                <a16:creationId xmlns:a16="http://schemas.microsoft.com/office/drawing/2014/main" id="{47165DAF-CF68-F2C1-52EF-29EC47CE2B61}"/>
+                <a16:creationId xmlns:a16="http://schemas.microsoft.com/office/drawing/2014/main" id="{C6984698-044C-5DCA-BCCB-96EB496993AA}"/>
               </a:ext>
             </a:extLst>
           </p:cNvPr>
@@ -14387,14 +14621,15 @@
         </p:nvPicPr>
         <p:blipFill>
           <a:blip r:embed="rId2"/>
+          <a:srcRect l="6468" t="1949" r="10754" b="6828"/>
           <a:stretch>
             <a:fillRect/>
           </a:stretch>
         </p:blipFill>
         <p:spPr>
           <a:xfrm>
-            <a:off x="7304165" y="817926"/>
-            <a:ext cx="4887835" cy="5595457"/>
+            <a:off x="7045179" y="1086843"/>
+            <a:ext cx="4721558" cy="2956650"/>
           </a:xfrm>
           <a:prstGeom prst="rect">
             <a:avLst/>
@@ -15056,159 +15291,10 @@
       </mc:AlternateContent>
       <p:sp>
         <p:nvSpPr>
-          <p:cNvPr id="9" name="왼쪽 중괄호 8">
+          <p:cNvPr id="18" name="TextBox 17">
             <a:extLst>
               <a:ext uri="{FF2B5EF4-FFF2-40B4-BE49-F238E27FC236}">
-                <a16:creationId xmlns:a16="http://schemas.microsoft.com/office/drawing/2014/main" id="{46E4C31A-A84D-9B90-6266-4B64772AC06B}"/>
-              </a:ext>
-            </a:extLst>
-          </p:cNvPr>
-          <p:cNvSpPr/>
-          <p:nvPr/>
-        </p:nvSpPr>
-        <p:spPr>
-          <a:xfrm>
-            <a:off x="7693237" y="2514688"/>
-            <a:ext cx="226503" cy="874626"/>
-          </a:xfrm>
-          <a:prstGeom prst="leftBrace">
-            <a:avLst>
-              <a:gd name="adj1" fmla="val 64610"/>
-              <a:gd name="adj2" fmla="val 49199"/>
-            </a:avLst>
-          </a:prstGeom>
-          <a:ln>
-            <a:solidFill>
-              <a:schemeClr val="accent2"/>
-            </a:solidFill>
-            <a:prstDash val="sysDash"/>
-          </a:ln>
-        </p:spPr>
-        <p:style>
-          <a:lnRef idx="2">
-            <a:schemeClr val="accent1"/>
-          </a:lnRef>
-          <a:fillRef idx="0">
-            <a:schemeClr val="accent1"/>
-          </a:fillRef>
-          <a:effectRef idx="1">
-            <a:schemeClr val="accent1"/>
-          </a:effectRef>
-          <a:fontRef idx="minor">
-            <a:schemeClr val="tx1"/>
-          </a:fontRef>
-        </p:style>
-        <p:txBody>
-          <a:bodyPr rtlCol="0" anchor="ctr"/>
-          <a:lstStyle/>
-          <a:p>
-            <a:pPr algn="ctr"/>
-            <a:endParaRPr lang="ko-KR" altLang="en-US"/>
-          </a:p>
-        </p:txBody>
-      </p:sp>
-      <mc:AlternateContent xmlns:mc="http://schemas.openxmlformats.org/markup-compatibility/2006" xmlns:a14="http://schemas.microsoft.com/office/drawing/2010/main">
-        <mc:Choice Requires="a14">
-          <p:sp>
-            <p:nvSpPr>
-              <p:cNvPr id="10" name="TextBox 9">
-                <a:extLst>
-                  <a:ext uri="{FF2B5EF4-FFF2-40B4-BE49-F238E27FC236}">
-                    <a16:creationId xmlns:a16="http://schemas.microsoft.com/office/drawing/2014/main" id="{F412809A-3CFE-0BFE-E2FE-5C0DDE78D0F7}"/>
-                  </a:ext>
-                </a:extLst>
-              </p:cNvPr>
-              <p:cNvSpPr txBox="1"/>
-              <p:nvPr/>
-            </p:nvSpPr>
-            <p:spPr>
-              <a:xfrm>
-                <a:off x="7473306" y="2723691"/>
-                <a:ext cx="234950" cy="374526"/>
-              </a:xfrm>
-              <a:prstGeom prst="rect">
-                <a:avLst/>
-              </a:prstGeom>
-              <a:noFill/>
-            </p:spPr>
-            <p:txBody>
-              <a:bodyPr wrap="square">
-                <a:spAutoFit/>
-              </a:bodyPr>
-              <a:lstStyle/>
-              <a:p>
-                <a:pPr/>
-                <a14:m>
-                  <m:oMathPara xmlns:m="http://schemas.openxmlformats.org/officeDocument/2006/math">
-                    <m:oMath>
-                      <m:r>
-                        <m:rPr>
-                          <m:sty m:val="p"/>
-                        </m:rPr>
-                        <a:rPr lang="en-US" altLang="ko-KR" b="0" i="0" smtClean="0">
-                          <a:latin typeface="Cambria Math" panose="02040503050406030204" pitchFamily="18" charset="0"/>
-                        </a:rPr>
-                        <m:t>t</m:t>
-                      </m:r>
-                    </m:oMath>
-                  </m:oMathPara>
-                </a14:m>
-                <a:endParaRPr lang="ko-KR" altLang="en-US" dirty="0"/>
-              </a:p>
-            </p:txBody>
-          </p:sp>
-        </mc:Choice>
-        <mc:Fallback xmlns="">
-          <p:sp>
-            <p:nvSpPr>
-              <p:cNvPr id="10" name="TextBox 9">
-                <a:extLst>
-                  <a:ext uri="{FF2B5EF4-FFF2-40B4-BE49-F238E27FC236}">
-                    <a16:creationId xmlns:a16="http://schemas.microsoft.com/office/drawing/2014/main" id="{F412809A-3CFE-0BFE-E2FE-5C0DDE78D0F7}"/>
-                  </a:ext>
-                </a:extLst>
-              </p:cNvPr>
-              <p:cNvSpPr txBox="1">
-                <a:spLocks noRot="1" noChangeAspect="1" noMove="1" noResize="1" noEditPoints="1" noAdjustHandles="1" noChangeArrowheads="1" noChangeShapeType="1" noTextEdit="1"/>
-              </p:cNvSpPr>
-              <p:nvPr/>
-            </p:nvSpPr>
-            <p:spPr>
-              <a:xfrm>
-                <a:off x="7473306" y="2723691"/>
-                <a:ext cx="234950" cy="374526"/>
-              </a:xfrm>
-              <a:prstGeom prst="rect">
-                <a:avLst/>
-              </a:prstGeom>
-              <a:blipFill>
-                <a:blip r:embed="rId4"/>
-                <a:stretch>
-                  <a:fillRect r="-5263"/>
-                </a:stretch>
-              </a:blipFill>
-            </p:spPr>
-            <p:txBody>
-              <a:bodyPr/>
-              <a:lstStyle/>
-              <a:p>
-                <a:r>
-                  <a:rPr lang="ko-KR" altLang="en-US">
-                    <a:noFill/>
-                  </a:rPr>
-                  <a:t> </a:t>
-                </a:r>
-              </a:p>
-            </p:txBody>
-          </p:sp>
-        </mc:Fallback>
-      </mc:AlternateContent>
-      <p:sp>
-        <p:nvSpPr>
-          <p:cNvPr id="11" name="TextBox 10">
-            <a:extLst>
-              <a:ext uri="{FF2B5EF4-FFF2-40B4-BE49-F238E27FC236}">
-                <a16:creationId xmlns:a16="http://schemas.microsoft.com/office/drawing/2014/main" id="{700788E0-75D7-5929-F32F-7A82BB51B949}"/>
+                <a16:creationId xmlns:a16="http://schemas.microsoft.com/office/drawing/2014/main" id="{D8219D4E-4BC4-C60D-F286-90D0966878FC}"/>
               </a:ext>
             </a:extLst>
           </p:cNvPr>
@@ -15217,8 +15303,8 @@
         </p:nvSpPr>
         <p:spPr>
           <a:xfrm>
-            <a:off x="8304127" y="2728885"/>
-            <a:ext cx="260350" cy="369332"/>
+            <a:off x="8631573" y="1086843"/>
+            <a:ext cx="2211198" cy="276999"/>
           </a:xfrm>
           <a:prstGeom prst="rect">
             <a:avLst/>
@@ -15231,47 +15317,20 @@
           </a:bodyPr>
           <a:lstStyle/>
           <a:p>
-            <a:r>
-              <a:rPr lang="en-US" altLang="ko-KR" dirty="0"/>
-              <a:t>A</a:t>
-            </a:r>
-            <a:endParaRPr lang="ko-KR" altLang="en-US" dirty="0"/>
-          </a:p>
-        </p:txBody>
-      </p:sp>
-      <p:sp>
-        <p:nvSpPr>
-          <p:cNvPr id="12" name="TextBox 11">
-            <a:extLst>
-              <a:ext uri="{FF2B5EF4-FFF2-40B4-BE49-F238E27FC236}">
-                <a16:creationId xmlns:a16="http://schemas.microsoft.com/office/drawing/2014/main" id="{9D8FB1E9-BE2E-CCC3-2D84-D305BB794BC2}"/>
-              </a:ext>
-            </a:extLst>
-          </p:cNvPr>
-          <p:cNvSpPr txBox="1"/>
-          <p:nvPr/>
-        </p:nvSpPr>
-        <p:spPr>
-          <a:xfrm>
-            <a:off x="9184630" y="2879890"/>
-            <a:ext cx="260350" cy="369332"/>
-          </a:xfrm>
-          <a:prstGeom prst="rect">
-            <a:avLst/>
-          </a:prstGeom>
-          <a:noFill/>
-        </p:spPr>
-        <p:txBody>
-          <a:bodyPr wrap="square">
-            <a:spAutoFit/>
-          </a:bodyPr>
-          <a:lstStyle/>
-          <a:p>
-            <a:r>
-              <a:rPr lang="en-US" altLang="ko-KR" dirty="0"/>
-              <a:t>B</a:t>
-            </a:r>
-            <a:endParaRPr lang="ko-KR" altLang="en-US" dirty="0"/>
+            <a:pPr algn="ctr"/>
+            <a:r>
+              <a:rPr lang="en-US" altLang="ko-KR" sz="1200" spc="-50" dirty="0"/>
+              <a:t>&lt;</a:t>
+            </a:r>
+            <a:r>
+              <a:rPr lang="ko-KR" altLang="en-US" sz="1200" spc="-50" dirty="0"/>
+              <a:t>조세의 초과부담</a:t>
+            </a:r>
+            <a:r>
+              <a:rPr lang="en-US" altLang="ko-KR" sz="1200" spc="-50" dirty="0"/>
+              <a:t>&gt;</a:t>
+            </a:r>
+            <a:endParaRPr lang="ko-KR" altLang="en-US" sz="1400" dirty="0"/>
           </a:p>
         </p:txBody>
       </p:sp>
@@ -17060,541 +17119,6 @@
           </a:p>
         </p:txBody>
       </p:sp>
-      <p:grpSp>
-        <p:nvGrpSpPr>
-          <p:cNvPr id="28" name="그룹 27">
-            <a:extLst>
-              <a:ext uri="{FF2B5EF4-FFF2-40B4-BE49-F238E27FC236}">
-                <a16:creationId xmlns:a16="http://schemas.microsoft.com/office/drawing/2014/main" id="{33B13F15-FA5F-5988-402B-92E8990BE1B1}"/>
-              </a:ext>
-            </a:extLst>
-          </p:cNvPr>
-          <p:cNvGrpSpPr/>
-          <p:nvPr/>
-        </p:nvGrpSpPr>
-        <p:grpSpPr>
-          <a:xfrm>
-            <a:off x="5067300" y="1110049"/>
-            <a:ext cx="7124700" cy="5282078"/>
-            <a:chOff x="4089523" y="661950"/>
-            <a:chExt cx="7892927" cy="5949950"/>
-          </a:xfrm>
-        </p:grpSpPr>
-        <p:pic>
-          <p:nvPicPr>
-            <p:cNvPr id="9" name="그림 8" descr="라인, 텍스트, 도표, 그래프이(가) 표시된 사진&#10;&#10;AI 생성 콘텐츠는 정확하지 않을 수 있습니다.">
-              <a:extLst>
-                <a:ext uri="{FF2B5EF4-FFF2-40B4-BE49-F238E27FC236}">
-                  <a16:creationId xmlns:a16="http://schemas.microsoft.com/office/drawing/2014/main" id="{D852E153-0E81-5586-EA34-39321E46EC7A}"/>
-                </a:ext>
-              </a:extLst>
-            </p:cNvPr>
-            <p:cNvPicPr>
-              <a:picLocks noChangeAspect="1"/>
-            </p:cNvPicPr>
-            <p:nvPr/>
-          </p:nvPicPr>
-          <p:blipFill>
-            <a:blip r:embed="rId2"/>
-            <a:stretch>
-              <a:fillRect/>
-            </a:stretch>
-          </p:blipFill>
-          <p:spPr>
-            <a:xfrm>
-              <a:off x="4089523" y="661950"/>
-              <a:ext cx="7657593" cy="5949950"/>
-            </a:xfrm>
-            <a:prstGeom prst="rect">
-              <a:avLst/>
-            </a:prstGeom>
-          </p:spPr>
-        </p:pic>
-        <p:sp>
-          <p:nvSpPr>
-            <p:cNvPr id="11" name="TextBox 10">
-              <a:extLst>
-                <a:ext uri="{FF2B5EF4-FFF2-40B4-BE49-F238E27FC236}">
-                  <a16:creationId xmlns:a16="http://schemas.microsoft.com/office/drawing/2014/main" id="{A3305BBC-4414-837E-6060-1AB2F7A47698}"/>
-                </a:ext>
-              </a:extLst>
-            </p:cNvPr>
-            <p:cNvSpPr txBox="1"/>
-            <p:nvPr/>
-          </p:nvSpPr>
-          <p:spPr>
-            <a:xfrm>
-              <a:off x="7035800" y="2398159"/>
-              <a:ext cx="254000" cy="369332"/>
-            </a:xfrm>
-            <a:prstGeom prst="rect">
-              <a:avLst/>
-            </a:prstGeom>
-            <a:noFill/>
-          </p:spPr>
-          <p:txBody>
-            <a:bodyPr wrap="square">
-              <a:spAutoFit/>
-            </a:bodyPr>
-            <a:lstStyle/>
-            <a:p>
-              <a:r>
-                <a:rPr lang="en-US" altLang="ko-KR" sz="1800" spc="-50" dirty="0"/>
-                <a:t>a</a:t>
-              </a:r>
-              <a:endParaRPr lang="ko-KR" altLang="en-US" dirty="0"/>
-            </a:p>
-          </p:txBody>
-        </p:sp>
-        <p:sp>
-          <p:nvSpPr>
-            <p:cNvPr id="13" name="TextBox 12">
-              <a:extLst>
-                <a:ext uri="{FF2B5EF4-FFF2-40B4-BE49-F238E27FC236}">
-                  <a16:creationId xmlns:a16="http://schemas.microsoft.com/office/drawing/2014/main" id="{D1429BD7-824C-A463-E389-A9988ECB2BC9}"/>
-                </a:ext>
-              </a:extLst>
-            </p:cNvPr>
-            <p:cNvSpPr txBox="1"/>
-            <p:nvPr/>
-          </p:nvSpPr>
-          <p:spPr>
-            <a:xfrm>
-              <a:off x="7035800" y="3598310"/>
-              <a:ext cx="254000" cy="369332"/>
-            </a:xfrm>
-            <a:prstGeom prst="rect">
-              <a:avLst/>
-            </a:prstGeom>
-            <a:noFill/>
-          </p:spPr>
-          <p:txBody>
-            <a:bodyPr wrap="square">
-              <a:spAutoFit/>
-            </a:bodyPr>
-            <a:lstStyle/>
-            <a:p>
-              <a:r>
-                <a:rPr lang="en-US" altLang="ko-KR" sz="1800" spc="-50" dirty="0"/>
-                <a:t>b</a:t>
-              </a:r>
-              <a:endParaRPr lang="ko-KR" altLang="en-US" dirty="0"/>
-            </a:p>
-          </p:txBody>
-        </p:sp>
-        <p:sp>
-          <p:nvSpPr>
-            <p:cNvPr id="14" name="TextBox 13">
-              <a:extLst>
-                <a:ext uri="{FF2B5EF4-FFF2-40B4-BE49-F238E27FC236}">
-                  <a16:creationId xmlns:a16="http://schemas.microsoft.com/office/drawing/2014/main" id="{62856BEA-74EC-5B8A-C1AA-85CC21C35A46}"/>
-                </a:ext>
-              </a:extLst>
-            </p:cNvPr>
-            <p:cNvSpPr txBox="1"/>
-            <p:nvPr/>
-          </p:nvSpPr>
-          <p:spPr>
-            <a:xfrm>
-              <a:off x="8007350" y="3598310"/>
-              <a:ext cx="254000" cy="369332"/>
-            </a:xfrm>
-            <a:prstGeom prst="rect">
-              <a:avLst/>
-            </a:prstGeom>
-            <a:noFill/>
-          </p:spPr>
-          <p:txBody>
-            <a:bodyPr wrap="square">
-              <a:spAutoFit/>
-            </a:bodyPr>
-            <a:lstStyle/>
-            <a:p>
-              <a:r>
-                <a:rPr lang="en-US" altLang="ko-KR" sz="1800" spc="-50" dirty="0"/>
-                <a:t>g</a:t>
-              </a:r>
-              <a:endParaRPr lang="ko-KR" altLang="en-US" dirty="0"/>
-            </a:p>
-          </p:txBody>
-        </p:sp>
-        <p:sp>
-          <p:nvSpPr>
-            <p:cNvPr id="16" name="TextBox 15">
-              <a:extLst>
-                <a:ext uri="{FF2B5EF4-FFF2-40B4-BE49-F238E27FC236}">
-                  <a16:creationId xmlns:a16="http://schemas.microsoft.com/office/drawing/2014/main" id="{3B331819-BDB6-9D56-DFA5-505916C374CC}"/>
-                </a:ext>
-              </a:extLst>
-            </p:cNvPr>
-            <p:cNvSpPr txBox="1"/>
-            <p:nvPr/>
-          </p:nvSpPr>
-          <p:spPr>
-            <a:xfrm>
-              <a:off x="7035800" y="2863610"/>
-              <a:ext cx="254000" cy="369332"/>
-            </a:xfrm>
-            <a:prstGeom prst="rect">
-              <a:avLst/>
-            </a:prstGeom>
-            <a:noFill/>
-          </p:spPr>
-          <p:txBody>
-            <a:bodyPr wrap="square">
-              <a:spAutoFit/>
-            </a:bodyPr>
-            <a:lstStyle/>
-            <a:p>
-              <a:r>
-                <a:rPr lang="en-US" altLang="ko-KR" dirty="0"/>
-                <a:t>f</a:t>
-              </a:r>
-              <a:endParaRPr lang="ko-KR" altLang="en-US" dirty="0"/>
-            </a:p>
-          </p:txBody>
-        </p:sp>
-        <p:sp>
-          <p:nvSpPr>
-            <p:cNvPr id="17" name="TextBox 16">
-              <a:extLst>
-                <a:ext uri="{FF2B5EF4-FFF2-40B4-BE49-F238E27FC236}">
-                  <a16:creationId xmlns:a16="http://schemas.microsoft.com/office/drawing/2014/main" id="{1DD78934-A8C8-83C4-8CC0-DC60B4F42679}"/>
-                </a:ext>
-              </a:extLst>
-            </p:cNvPr>
-            <p:cNvSpPr txBox="1"/>
-            <p:nvPr/>
-          </p:nvSpPr>
-          <p:spPr>
-            <a:xfrm>
-              <a:off x="8007350" y="2866270"/>
-              <a:ext cx="254000" cy="369332"/>
-            </a:xfrm>
-            <a:prstGeom prst="rect">
-              <a:avLst/>
-            </a:prstGeom>
-            <a:noFill/>
-          </p:spPr>
-          <p:txBody>
-            <a:bodyPr wrap="square">
-              <a:spAutoFit/>
-            </a:bodyPr>
-            <a:lstStyle/>
-            <a:p>
-              <a:r>
-                <a:rPr lang="en-US" altLang="ko-KR" spc="-50" dirty="0"/>
-                <a:t>d</a:t>
-              </a:r>
-              <a:endParaRPr lang="ko-KR" altLang="en-US" dirty="0"/>
-            </a:p>
-          </p:txBody>
-        </p:sp>
-        <p:sp>
-          <p:nvSpPr>
-            <p:cNvPr id="18" name="TextBox 17">
-              <a:extLst>
-                <a:ext uri="{FF2B5EF4-FFF2-40B4-BE49-F238E27FC236}">
-                  <a16:creationId xmlns:a16="http://schemas.microsoft.com/office/drawing/2014/main" id="{5F20D4A6-B67A-6888-E65E-2A6CFDBEDE99}"/>
-                </a:ext>
-              </a:extLst>
-            </p:cNvPr>
-            <p:cNvSpPr txBox="1"/>
-            <p:nvPr/>
-          </p:nvSpPr>
-          <p:spPr>
-            <a:xfrm>
-              <a:off x="9379142" y="3598310"/>
-              <a:ext cx="254000" cy="369332"/>
-            </a:xfrm>
-            <a:prstGeom prst="rect">
-              <a:avLst/>
-            </a:prstGeom>
-            <a:noFill/>
-          </p:spPr>
-          <p:txBody>
-            <a:bodyPr wrap="square">
-              <a:spAutoFit/>
-            </a:bodyPr>
-            <a:lstStyle/>
-            <a:p>
-              <a:r>
-                <a:rPr lang="en-US" altLang="ko-KR" sz="1800" spc="-50" dirty="0"/>
-                <a:t>c</a:t>
-              </a:r>
-              <a:endParaRPr lang="ko-KR" altLang="en-US" dirty="0"/>
-            </a:p>
-          </p:txBody>
-        </p:sp>
-        <p:sp>
-          <p:nvSpPr>
-            <p:cNvPr id="19" name="TextBox 18">
-              <a:extLst>
-                <a:ext uri="{FF2B5EF4-FFF2-40B4-BE49-F238E27FC236}">
-                  <a16:creationId xmlns:a16="http://schemas.microsoft.com/office/drawing/2014/main" id="{6529FCBA-895A-1348-D06C-C3F35029F0CC}"/>
-                </a:ext>
-              </a:extLst>
-            </p:cNvPr>
-            <p:cNvSpPr txBox="1"/>
-            <p:nvPr/>
-          </p:nvSpPr>
-          <p:spPr>
-            <a:xfrm>
-              <a:off x="8007350" y="4525410"/>
-              <a:ext cx="254000" cy="369332"/>
-            </a:xfrm>
-            <a:prstGeom prst="rect">
-              <a:avLst/>
-            </a:prstGeom>
-            <a:noFill/>
-          </p:spPr>
-          <p:txBody>
-            <a:bodyPr wrap="square">
-              <a:spAutoFit/>
-            </a:bodyPr>
-            <a:lstStyle/>
-            <a:p>
-              <a:r>
-                <a:rPr lang="en-US" altLang="ko-KR" sz="1800" spc="-50" dirty="0"/>
-                <a:t>e</a:t>
-              </a:r>
-              <a:endParaRPr lang="ko-KR" altLang="en-US" dirty="0"/>
-            </a:p>
-          </p:txBody>
-        </p:sp>
-        <p:sp>
-          <p:nvSpPr>
-            <p:cNvPr id="20" name="TextBox 19">
-              <a:extLst>
-                <a:ext uri="{FF2B5EF4-FFF2-40B4-BE49-F238E27FC236}">
-                  <a16:creationId xmlns:a16="http://schemas.microsoft.com/office/drawing/2014/main" id="{182824C9-4F04-FB60-9B32-205D12C0149B}"/>
-                </a:ext>
-              </a:extLst>
-            </p:cNvPr>
-            <p:cNvSpPr txBox="1"/>
-            <p:nvPr/>
-          </p:nvSpPr>
-          <p:spPr>
-            <a:xfrm>
-              <a:off x="11271250" y="2967830"/>
-              <a:ext cx="711200" cy="369332"/>
-            </a:xfrm>
-            <a:prstGeom prst="rect">
-              <a:avLst/>
-            </a:prstGeom>
-            <a:noFill/>
-          </p:spPr>
-          <p:txBody>
-            <a:bodyPr wrap="square">
-              <a:spAutoFit/>
-            </a:bodyPr>
-            <a:lstStyle/>
-            <a:p>
-              <a:r>
-                <a:rPr lang="en-US" altLang="ko-KR" spc="-50" dirty="0"/>
-                <a:t>MC</a:t>
-              </a:r>
-              <a:r>
-                <a:rPr lang="en-US" altLang="ko-KR" spc="-50" baseline="-25000" dirty="0"/>
-                <a:t>s</a:t>
-              </a:r>
-              <a:endParaRPr lang="ko-KR" altLang="en-US" baseline="-25000" dirty="0"/>
-            </a:p>
-          </p:txBody>
-        </p:sp>
-        <p:sp>
-          <p:nvSpPr>
-            <p:cNvPr id="21" name="TextBox 20">
-              <a:extLst>
-                <a:ext uri="{FF2B5EF4-FFF2-40B4-BE49-F238E27FC236}">
-                  <a16:creationId xmlns:a16="http://schemas.microsoft.com/office/drawing/2014/main" id="{7EB8037E-6A5D-2459-A6EB-3E44700FCD37}"/>
-                </a:ext>
-              </a:extLst>
-            </p:cNvPr>
-            <p:cNvSpPr txBox="1"/>
-            <p:nvPr/>
-          </p:nvSpPr>
-          <p:spPr>
-            <a:xfrm>
-              <a:off x="11271250" y="3690587"/>
-              <a:ext cx="711200" cy="369332"/>
-            </a:xfrm>
-            <a:prstGeom prst="rect">
-              <a:avLst/>
-            </a:prstGeom>
-            <a:noFill/>
-          </p:spPr>
-          <p:txBody>
-            <a:bodyPr wrap="square">
-              <a:spAutoFit/>
-            </a:bodyPr>
-            <a:lstStyle/>
-            <a:p>
-              <a:r>
-                <a:rPr lang="en-US" altLang="ko-KR" spc="-50" dirty="0"/>
-                <a:t>MC</a:t>
-              </a:r>
-              <a:r>
-                <a:rPr lang="en-US" altLang="ko-KR" spc="-50" baseline="-25000" dirty="0"/>
-                <a:t>P</a:t>
-              </a:r>
-              <a:endParaRPr lang="ko-KR" altLang="en-US" baseline="-25000" dirty="0"/>
-            </a:p>
-          </p:txBody>
-        </p:sp>
-        <p:sp>
-          <p:nvSpPr>
-            <p:cNvPr id="22" name="TextBox 21">
-              <a:extLst>
-                <a:ext uri="{FF2B5EF4-FFF2-40B4-BE49-F238E27FC236}">
-                  <a16:creationId xmlns:a16="http://schemas.microsoft.com/office/drawing/2014/main" id="{5509F694-2262-F9A2-2B4A-9D086E07D1B0}"/>
-                </a:ext>
-              </a:extLst>
-            </p:cNvPr>
-            <p:cNvSpPr txBox="1"/>
-            <p:nvPr/>
-          </p:nvSpPr>
-          <p:spPr>
-            <a:xfrm>
-              <a:off x="11271250" y="4710076"/>
-              <a:ext cx="711200" cy="369332"/>
-            </a:xfrm>
-            <a:prstGeom prst="rect">
-              <a:avLst/>
-            </a:prstGeom>
-            <a:noFill/>
-          </p:spPr>
-          <p:txBody>
-            <a:bodyPr wrap="square">
-              <a:spAutoFit/>
-            </a:bodyPr>
-            <a:lstStyle/>
-            <a:p>
-              <a:r>
-                <a:rPr lang="en-US" altLang="ko-KR" spc="-50" dirty="0"/>
-                <a:t>MC</a:t>
-              </a:r>
-              <a:r>
-                <a:rPr lang="en-US" altLang="ko-KR" spc="-50" baseline="30000" dirty="0"/>
-                <a:t>*</a:t>
-              </a:r>
-              <a:endParaRPr lang="ko-KR" altLang="en-US" baseline="30000" dirty="0"/>
-            </a:p>
-          </p:txBody>
-        </p:sp>
-        <p:sp>
-          <p:nvSpPr>
-            <p:cNvPr id="23" name="TextBox 22">
-              <a:extLst>
-                <a:ext uri="{FF2B5EF4-FFF2-40B4-BE49-F238E27FC236}">
-                  <a16:creationId xmlns:a16="http://schemas.microsoft.com/office/drawing/2014/main" id="{EBC86793-A0E6-A176-28A9-D8EC0B9CE2DA}"/>
-                </a:ext>
-              </a:extLst>
-            </p:cNvPr>
-            <p:cNvSpPr txBox="1"/>
-            <p:nvPr/>
-          </p:nvSpPr>
-          <p:spPr>
-            <a:xfrm>
-              <a:off x="10160000" y="5186326"/>
-              <a:ext cx="711200" cy="369332"/>
-            </a:xfrm>
-            <a:prstGeom prst="rect">
-              <a:avLst/>
-            </a:prstGeom>
-            <a:noFill/>
-          </p:spPr>
-          <p:txBody>
-            <a:bodyPr wrap="square">
-              <a:spAutoFit/>
-            </a:bodyPr>
-            <a:lstStyle/>
-            <a:p>
-              <a:r>
-                <a:rPr lang="en-US" altLang="ko-KR" spc="-50" dirty="0"/>
-                <a:t>MR</a:t>
-              </a:r>
-              <a:r>
-                <a:rPr lang="en-US" altLang="ko-KR" spc="-50" baseline="30000" dirty="0"/>
-                <a:t>1</a:t>
-              </a:r>
-              <a:endParaRPr lang="ko-KR" altLang="en-US" baseline="30000" dirty="0"/>
-            </a:p>
-          </p:txBody>
-        </p:sp>
-        <p:sp>
-          <p:nvSpPr>
-            <p:cNvPr id="24" name="TextBox 23">
-              <a:extLst>
-                <a:ext uri="{FF2B5EF4-FFF2-40B4-BE49-F238E27FC236}">
-                  <a16:creationId xmlns:a16="http://schemas.microsoft.com/office/drawing/2014/main" id="{5BC1BA18-A432-1478-A297-A94499573EB9}"/>
-                </a:ext>
-              </a:extLst>
-            </p:cNvPr>
-            <p:cNvSpPr txBox="1"/>
-            <p:nvPr/>
-          </p:nvSpPr>
-          <p:spPr>
-            <a:xfrm>
-              <a:off x="8502650" y="5095800"/>
-              <a:ext cx="711200" cy="369332"/>
-            </a:xfrm>
-            <a:prstGeom prst="rect">
-              <a:avLst/>
-            </a:prstGeom>
-            <a:noFill/>
-          </p:spPr>
-          <p:txBody>
-            <a:bodyPr wrap="square">
-              <a:spAutoFit/>
-            </a:bodyPr>
-            <a:lstStyle/>
-            <a:p>
-              <a:r>
-                <a:rPr lang="en-US" altLang="ko-KR" spc="-50" dirty="0"/>
-                <a:t>MR</a:t>
-              </a:r>
-              <a:endParaRPr lang="ko-KR" altLang="en-US" baseline="30000" dirty="0"/>
-            </a:p>
-          </p:txBody>
-        </p:sp>
-        <p:sp>
-          <p:nvSpPr>
-            <p:cNvPr id="26" name="TextBox 25">
-              <a:extLst>
-                <a:ext uri="{FF2B5EF4-FFF2-40B4-BE49-F238E27FC236}">
-                  <a16:creationId xmlns:a16="http://schemas.microsoft.com/office/drawing/2014/main" id="{E9E76B64-E5EC-0AF7-8BD0-777F07070B5C}"/>
-                </a:ext>
-              </a:extLst>
-            </p:cNvPr>
-            <p:cNvSpPr txBox="1"/>
-            <p:nvPr/>
-          </p:nvSpPr>
-          <p:spPr>
-            <a:xfrm>
-              <a:off x="5587999" y="1620166"/>
-              <a:ext cx="915830" cy="416031"/>
-            </a:xfrm>
-            <a:prstGeom prst="rect">
-              <a:avLst/>
-            </a:prstGeom>
-            <a:noFill/>
-          </p:spPr>
-          <p:txBody>
-            <a:bodyPr wrap="square">
-              <a:spAutoFit/>
-            </a:bodyPr>
-            <a:lstStyle/>
-            <a:p>
-              <a:r>
-                <a:rPr lang="en-US" altLang="ko-KR" spc="-50" dirty="0"/>
-                <a:t>D=AR</a:t>
-              </a:r>
-              <a:endParaRPr lang="ko-KR" altLang="en-US" baseline="30000" dirty="0"/>
-            </a:p>
-          </p:txBody>
-        </p:sp>
-      </p:grpSp>
       <p:sp>
         <p:nvSpPr>
           <p:cNvPr id="29" name="TextBox 28">
@@ -17887,6 +17411,82 @@
               <a:t>오염배출량이 생산량에 비례하는 경우와 그렇지 않은 경우로 나누어 생각해볼 수 있음</a:t>
             </a:r>
             <a:endParaRPr lang="en-US" altLang="ko-KR" sz="1600" spc="-50" dirty="0"/>
+          </a:p>
+        </p:txBody>
+      </p:sp>
+      <p:pic>
+        <p:nvPicPr>
+          <p:cNvPr id="5" name="그림 4">
+            <a:extLst>
+              <a:ext uri="{FF2B5EF4-FFF2-40B4-BE49-F238E27FC236}">
+                <a16:creationId xmlns:a16="http://schemas.microsoft.com/office/drawing/2014/main" id="{8B8DA210-6D1D-28AF-111D-5314070F76B5}"/>
+              </a:ext>
+            </a:extLst>
+          </p:cNvPr>
+          <p:cNvPicPr>
+            <a:picLocks noChangeAspect="1"/>
+          </p:cNvPicPr>
+          <p:nvPr/>
+        </p:nvPicPr>
+        <p:blipFill>
+          <a:blip r:embed="rId2"/>
+          <a:srcRect l="9756" t="12652" r="3511" b="1603"/>
+          <a:stretch>
+            <a:fillRect/>
+          </a:stretch>
+        </p:blipFill>
+        <p:spPr>
+          <a:xfrm>
+            <a:off x="5144782" y="1765417"/>
+            <a:ext cx="6465974" cy="4484382"/>
+          </a:xfrm>
+          <a:prstGeom prst="rect">
+            <a:avLst/>
+          </a:prstGeom>
+        </p:spPr>
+      </p:pic>
+      <p:sp>
+        <p:nvSpPr>
+          <p:cNvPr id="7" name="TextBox 6">
+            <a:extLst>
+              <a:ext uri="{FF2B5EF4-FFF2-40B4-BE49-F238E27FC236}">
+                <a16:creationId xmlns:a16="http://schemas.microsoft.com/office/drawing/2014/main" id="{FA55A5E8-57E5-6C91-615D-917F96E4954B}"/>
+              </a:ext>
+            </a:extLst>
+          </p:cNvPr>
+          <p:cNvSpPr txBox="1"/>
+          <p:nvPr/>
+        </p:nvSpPr>
+        <p:spPr>
+          <a:xfrm>
+            <a:off x="7880758" y="1488418"/>
+            <a:ext cx="2211198" cy="276999"/>
+          </a:xfrm>
+          <a:prstGeom prst="rect">
+            <a:avLst/>
+          </a:prstGeom>
+          <a:noFill/>
+        </p:spPr>
+        <p:txBody>
+          <a:bodyPr wrap="square">
+            <a:spAutoFit/>
+          </a:bodyPr>
+          <a:lstStyle/>
+          <a:p>
+            <a:pPr algn="ctr"/>
+            <a:r>
+              <a:rPr lang="en-US" altLang="ko-KR" sz="1200" spc="-50" dirty="0"/>
+              <a:t>&lt;</a:t>
+            </a:r>
+            <a:r>
+              <a:rPr lang="ko-KR" altLang="en-US" sz="1200" spc="-50" dirty="0"/>
+              <a:t>독점기업의 오염규제</a:t>
+            </a:r>
+            <a:r>
+              <a:rPr lang="en-US" altLang="ko-KR" sz="1200" spc="-50" dirty="0"/>
+              <a:t>&gt;</a:t>
+            </a:r>
+            <a:endParaRPr lang="ko-KR" altLang="en-US" sz="1400" dirty="0"/>
           </a:p>
         </p:txBody>
       </p:sp>
@@ -17982,541 +17582,6 @@
           </a:p>
         </p:txBody>
       </p:sp>
-      <p:grpSp>
-        <p:nvGrpSpPr>
-          <p:cNvPr id="5" name="그룹 4">
-            <a:extLst>
-              <a:ext uri="{FF2B5EF4-FFF2-40B4-BE49-F238E27FC236}">
-                <a16:creationId xmlns:a16="http://schemas.microsoft.com/office/drawing/2014/main" id="{10A9C0A1-1FA3-7606-4636-ECA1313888E0}"/>
-              </a:ext>
-            </a:extLst>
-          </p:cNvPr>
-          <p:cNvGrpSpPr/>
-          <p:nvPr/>
-        </p:nvGrpSpPr>
-        <p:grpSpPr>
-          <a:xfrm>
-            <a:off x="5067300" y="1110049"/>
-            <a:ext cx="7124700" cy="5282078"/>
-            <a:chOff x="4089523" y="661950"/>
-            <a:chExt cx="7892927" cy="5949950"/>
-          </a:xfrm>
-        </p:grpSpPr>
-        <p:pic>
-          <p:nvPicPr>
-            <p:cNvPr id="6" name="그림 5" descr="라인, 텍스트, 도표, 그래프이(가) 표시된 사진&#10;&#10;AI 생성 콘텐츠는 정확하지 않을 수 있습니다.">
-              <a:extLst>
-                <a:ext uri="{FF2B5EF4-FFF2-40B4-BE49-F238E27FC236}">
-                  <a16:creationId xmlns:a16="http://schemas.microsoft.com/office/drawing/2014/main" id="{A61B0619-C987-D177-4639-5B8127621A90}"/>
-                </a:ext>
-              </a:extLst>
-            </p:cNvPr>
-            <p:cNvPicPr>
-              <a:picLocks noChangeAspect="1"/>
-            </p:cNvPicPr>
-            <p:nvPr/>
-          </p:nvPicPr>
-          <p:blipFill>
-            <a:blip r:embed="rId2"/>
-            <a:stretch>
-              <a:fillRect/>
-            </a:stretch>
-          </p:blipFill>
-          <p:spPr>
-            <a:xfrm>
-              <a:off x="4089523" y="661950"/>
-              <a:ext cx="7657593" cy="5949950"/>
-            </a:xfrm>
-            <a:prstGeom prst="rect">
-              <a:avLst/>
-            </a:prstGeom>
-          </p:spPr>
-        </p:pic>
-        <p:sp>
-          <p:nvSpPr>
-            <p:cNvPr id="7" name="TextBox 6">
-              <a:extLst>
-                <a:ext uri="{FF2B5EF4-FFF2-40B4-BE49-F238E27FC236}">
-                  <a16:creationId xmlns:a16="http://schemas.microsoft.com/office/drawing/2014/main" id="{22AFACD5-1206-E254-31A3-7887EF96B48D}"/>
-                </a:ext>
-              </a:extLst>
-            </p:cNvPr>
-            <p:cNvSpPr txBox="1"/>
-            <p:nvPr/>
-          </p:nvSpPr>
-          <p:spPr>
-            <a:xfrm>
-              <a:off x="7035800" y="2398159"/>
-              <a:ext cx="254000" cy="369332"/>
-            </a:xfrm>
-            <a:prstGeom prst="rect">
-              <a:avLst/>
-            </a:prstGeom>
-            <a:noFill/>
-          </p:spPr>
-          <p:txBody>
-            <a:bodyPr wrap="square">
-              <a:spAutoFit/>
-            </a:bodyPr>
-            <a:lstStyle/>
-            <a:p>
-              <a:r>
-                <a:rPr lang="en-US" altLang="ko-KR" sz="1800" spc="-50" dirty="0"/>
-                <a:t>a</a:t>
-              </a:r>
-              <a:endParaRPr lang="ko-KR" altLang="en-US" dirty="0"/>
-            </a:p>
-          </p:txBody>
-        </p:sp>
-        <p:sp>
-          <p:nvSpPr>
-            <p:cNvPr id="8" name="TextBox 7">
-              <a:extLst>
-                <a:ext uri="{FF2B5EF4-FFF2-40B4-BE49-F238E27FC236}">
-                  <a16:creationId xmlns:a16="http://schemas.microsoft.com/office/drawing/2014/main" id="{D751CB4B-F4EC-2F79-451C-60475067FE63}"/>
-                </a:ext>
-              </a:extLst>
-            </p:cNvPr>
-            <p:cNvSpPr txBox="1"/>
-            <p:nvPr/>
-          </p:nvSpPr>
-          <p:spPr>
-            <a:xfrm>
-              <a:off x="7035800" y="3598310"/>
-              <a:ext cx="254000" cy="369332"/>
-            </a:xfrm>
-            <a:prstGeom prst="rect">
-              <a:avLst/>
-            </a:prstGeom>
-            <a:noFill/>
-          </p:spPr>
-          <p:txBody>
-            <a:bodyPr wrap="square">
-              <a:spAutoFit/>
-            </a:bodyPr>
-            <a:lstStyle/>
-            <a:p>
-              <a:r>
-                <a:rPr lang="en-US" altLang="ko-KR" sz="1800" spc="-50" dirty="0"/>
-                <a:t>b</a:t>
-              </a:r>
-              <a:endParaRPr lang="ko-KR" altLang="en-US" dirty="0"/>
-            </a:p>
-          </p:txBody>
-        </p:sp>
-        <p:sp>
-          <p:nvSpPr>
-            <p:cNvPr id="9" name="TextBox 8">
-              <a:extLst>
-                <a:ext uri="{FF2B5EF4-FFF2-40B4-BE49-F238E27FC236}">
-                  <a16:creationId xmlns:a16="http://schemas.microsoft.com/office/drawing/2014/main" id="{1B1FC7AB-6E27-94C0-EA4F-E1EADE1FED1A}"/>
-                </a:ext>
-              </a:extLst>
-            </p:cNvPr>
-            <p:cNvSpPr txBox="1"/>
-            <p:nvPr/>
-          </p:nvSpPr>
-          <p:spPr>
-            <a:xfrm>
-              <a:off x="8007350" y="3598310"/>
-              <a:ext cx="254000" cy="369332"/>
-            </a:xfrm>
-            <a:prstGeom prst="rect">
-              <a:avLst/>
-            </a:prstGeom>
-            <a:noFill/>
-          </p:spPr>
-          <p:txBody>
-            <a:bodyPr wrap="square">
-              <a:spAutoFit/>
-            </a:bodyPr>
-            <a:lstStyle/>
-            <a:p>
-              <a:r>
-                <a:rPr lang="en-US" altLang="ko-KR" sz="1800" spc="-50" dirty="0"/>
-                <a:t>g</a:t>
-              </a:r>
-              <a:endParaRPr lang="ko-KR" altLang="en-US" dirty="0"/>
-            </a:p>
-          </p:txBody>
-        </p:sp>
-        <p:sp>
-          <p:nvSpPr>
-            <p:cNvPr id="10" name="TextBox 9">
-              <a:extLst>
-                <a:ext uri="{FF2B5EF4-FFF2-40B4-BE49-F238E27FC236}">
-                  <a16:creationId xmlns:a16="http://schemas.microsoft.com/office/drawing/2014/main" id="{A6399FA6-FAE9-B20E-823A-7B6C6B82B9B6}"/>
-                </a:ext>
-              </a:extLst>
-            </p:cNvPr>
-            <p:cNvSpPr txBox="1"/>
-            <p:nvPr/>
-          </p:nvSpPr>
-          <p:spPr>
-            <a:xfrm>
-              <a:off x="7035800" y="2863610"/>
-              <a:ext cx="254000" cy="369332"/>
-            </a:xfrm>
-            <a:prstGeom prst="rect">
-              <a:avLst/>
-            </a:prstGeom>
-            <a:noFill/>
-          </p:spPr>
-          <p:txBody>
-            <a:bodyPr wrap="square">
-              <a:spAutoFit/>
-            </a:bodyPr>
-            <a:lstStyle/>
-            <a:p>
-              <a:r>
-                <a:rPr lang="en-US" altLang="ko-KR" dirty="0"/>
-                <a:t>f</a:t>
-              </a:r>
-              <a:endParaRPr lang="ko-KR" altLang="en-US" dirty="0"/>
-            </a:p>
-          </p:txBody>
-        </p:sp>
-        <p:sp>
-          <p:nvSpPr>
-            <p:cNvPr id="11" name="TextBox 10">
-              <a:extLst>
-                <a:ext uri="{FF2B5EF4-FFF2-40B4-BE49-F238E27FC236}">
-                  <a16:creationId xmlns:a16="http://schemas.microsoft.com/office/drawing/2014/main" id="{1BE4DA52-B0BA-59E3-0059-DE95B28AC25A}"/>
-                </a:ext>
-              </a:extLst>
-            </p:cNvPr>
-            <p:cNvSpPr txBox="1"/>
-            <p:nvPr/>
-          </p:nvSpPr>
-          <p:spPr>
-            <a:xfrm>
-              <a:off x="8007350" y="2866270"/>
-              <a:ext cx="254000" cy="369332"/>
-            </a:xfrm>
-            <a:prstGeom prst="rect">
-              <a:avLst/>
-            </a:prstGeom>
-            <a:noFill/>
-          </p:spPr>
-          <p:txBody>
-            <a:bodyPr wrap="square">
-              <a:spAutoFit/>
-            </a:bodyPr>
-            <a:lstStyle/>
-            <a:p>
-              <a:r>
-                <a:rPr lang="en-US" altLang="ko-KR" spc="-50" dirty="0"/>
-                <a:t>d</a:t>
-              </a:r>
-              <a:endParaRPr lang="ko-KR" altLang="en-US" dirty="0"/>
-            </a:p>
-          </p:txBody>
-        </p:sp>
-        <p:sp>
-          <p:nvSpPr>
-            <p:cNvPr id="12" name="TextBox 11">
-              <a:extLst>
-                <a:ext uri="{FF2B5EF4-FFF2-40B4-BE49-F238E27FC236}">
-                  <a16:creationId xmlns:a16="http://schemas.microsoft.com/office/drawing/2014/main" id="{EE29EE2B-FFEF-6BE7-91B6-37116E40DF37}"/>
-                </a:ext>
-              </a:extLst>
-            </p:cNvPr>
-            <p:cNvSpPr txBox="1"/>
-            <p:nvPr/>
-          </p:nvSpPr>
-          <p:spPr>
-            <a:xfrm>
-              <a:off x="9379142" y="3598310"/>
-              <a:ext cx="254000" cy="369332"/>
-            </a:xfrm>
-            <a:prstGeom prst="rect">
-              <a:avLst/>
-            </a:prstGeom>
-            <a:noFill/>
-          </p:spPr>
-          <p:txBody>
-            <a:bodyPr wrap="square">
-              <a:spAutoFit/>
-            </a:bodyPr>
-            <a:lstStyle/>
-            <a:p>
-              <a:r>
-                <a:rPr lang="en-US" altLang="ko-KR" sz="1800" spc="-50" dirty="0"/>
-                <a:t>c</a:t>
-              </a:r>
-              <a:endParaRPr lang="ko-KR" altLang="en-US" dirty="0"/>
-            </a:p>
-          </p:txBody>
-        </p:sp>
-        <p:sp>
-          <p:nvSpPr>
-            <p:cNvPr id="13" name="TextBox 12">
-              <a:extLst>
-                <a:ext uri="{FF2B5EF4-FFF2-40B4-BE49-F238E27FC236}">
-                  <a16:creationId xmlns:a16="http://schemas.microsoft.com/office/drawing/2014/main" id="{239208EB-2C47-685D-1678-AF31CC3BFE1B}"/>
-                </a:ext>
-              </a:extLst>
-            </p:cNvPr>
-            <p:cNvSpPr txBox="1"/>
-            <p:nvPr/>
-          </p:nvSpPr>
-          <p:spPr>
-            <a:xfrm>
-              <a:off x="8007350" y="4525410"/>
-              <a:ext cx="254000" cy="369332"/>
-            </a:xfrm>
-            <a:prstGeom prst="rect">
-              <a:avLst/>
-            </a:prstGeom>
-            <a:noFill/>
-          </p:spPr>
-          <p:txBody>
-            <a:bodyPr wrap="square">
-              <a:spAutoFit/>
-            </a:bodyPr>
-            <a:lstStyle/>
-            <a:p>
-              <a:r>
-                <a:rPr lang="en-US" altLang="ko-KR" sz="1800" spc="-50" dirty="0"/>
-                <a:t>e</a:t>
-              </a:r>
-              <a:endParaRPr lang="ko-KR" altLang="en-US" dirty="0"/>
-            </a:p>
-          </p:txBody>
-        </p:sp>
-        <p:sp>
-          <p:nvSpPr>
-            <p:cNvPr id="14" name="TextBox 13">
-              <a:extLst>
-                <a:ext uri="{FF2B5EF4-FFF2-40B4-BE49-F238E27FC236}">
-                  <a16:creationId xmlns:a16="http://schemas.microsoft.com/office/drawing/2014/main" id="{85192EE9-30E4-B94E-5974-F05F3EDC60AF}"/>
-                </a:ext>
-              </a:extLst>
-            </p:cNvPr>
-            <p:cNvSpPr txBox="1"/>
-            <p:nvPr/>
-          </p:nvSpPr>
-          <p:spPr>
-            <a:xfrm>
-              <a:off x="11271250" y="2967830"/>
-              <a:ext cx="711200" cy="369332"/>
-            </a:xfrm>
-            <a:prstGeom prst="rect">
-              <a:avLst/>
-            </a:prstGeom>
-            <a:noFill/>
-          </p:spPr>
-          <p:txBody>
-            <a:bodyPr wrap="square">
-              <a:spAutoFit/>
-            </a:bodyPr>
-            <a:lstStyle/>
-            <a:p>
-              <a:r>
-                <a:rPr lang="en-US" altLang="ko-KR" spc="-50" dirty="0"/>
-                <a:t>MC</a:t>
-              </a:r>
-              <a:r>
-                <a:rPr lang="en-US" altLang="ko-KR" spc="-50" baseline="-25000" dirty="0"/>
-                <a:t>s</a:t>
-              </a:r>
-              <a:endParaRPr lang="ko-KR" altLang="en-US" baseline="-25000" dirty="0"/>
-            </a:p>
-          </p:txBody>
-        </p:sp>
-        <p:sp>
-          <p:nvSpPr>
-            <p:cNvPr id="15" name="TextBox 14">
-              <a:extLst>
-                <a:ext uri="{FF2B5EF4-FFF2-40B4-BE49-F238E27FC236}">
-                  <a16:creationId xmlns:a16="http://schemas.microsoft.com/office/drawing/2014/main" id="{9EB63944-34A8-B956-8BB1-56A9DEEB384E}"/>
-                </a:ext>
-              </a:extLst>
-            </p:cNvPr>
-            <p:cNvSpPr txBox="1"/>
-            <p:nvPr/>
-          </p:nvSpPr>
-          <p:spPr>
-            <a:xfrm>
-              <a:off x="11271250" y="3690587"/>
-              <a:ext cx="711200" cy="369332"/>
-            </a:xfrm>
-            <a:prstGeom prst="rect">
-              <a:avLst/>
-            </a:prstGeom>
-            <a:noFill/>
-          </p:spPr>
-          <p:txBody>
-            <a:bodyPr wrap="square">
-              <a:spAutoFit/>
-            </a:bodyPr>
-            <a:lstStyle/>
-            <a:p>
-              <a:r>
-                <a:rPr lang="en-US" altLang="ko-KR" spc="-50" dirty="0"/>
-                <a:t>MC</a:t>
-              </a:r>
-              <a:r>
-                <a:rPr lang="en-US" altLang="ko-KR" spc="-50" baseline="-25000" dirty="0"/>
-                <a:t>P</a:t>
-              </a:r>
-              <a:endParaRPr lang="ko-KR" altLang="en-US" baseline="-25000" dirty="0"/>
-            </a:p>
-          </p:txBody>
-        </p:sp>
-        <p:sp>
-          <p:nvSpPr>
-            <p:cNvPr id="16" name="TextBox 15">
-              <a:extLst>
-                <a:ext uri="{FF2B5EF4-FFF2-40B4-BE49-F238E27FC236}">
-                  <a16:creationId xmlns:a16="http://schemas.microsoft.com/office/drawing/2014/main" id="{E92E69F2-2800-2ED1-8CD2-AA11FC35EE50}"/>
-                </a:ext>
-              </a:extLst>
-            </p:cNvPr>
-            <p:cNvSpPr txBox="1"/>
-            <p:nvPr/>
-          </p:nvSpPr>
-          <p:spPr>
-            <a:xfrm>
-              <a:off x="11271250" y="4710076"/>
-              <a:ext cx="711200" cy="369332"/>
-            </a:xfrm>
-            <a:prstGeom prst="rect">
-              <a:avLst/>
-            </a:prstGeom>
-            <a:noFill/>
-          </p:spPr>
-          <p:txBody>
-            <a:bodyPr wrap="square">
-              <a:spAutoFit/>
-            </a:bodyPr>
-            <a:lstStyle/>
-            <a:p>
-              <a:r>
-                <a:rPr lang="en-US" altLang="ko-KR" spc="-50" dirty="0"/>
-                <a:t>MC</a:t>
-              </a:r>
-              <a:r>
-                <a:rPr lang="en-US" altLang="ko-KR" spc="-50" baseline="30000" dirty="0"/>
-                <a:t>*</a:t>
-              </a:r>
-              <a:endParaRPr lang="ko-KR" altLang="en-US" baseline="30000" dirty="0"/>
-            </a:p>
-          </p:txBody>
-        </p:sp>
-        <p:sp>
-          <p:nvSpPr>
-            <p:cNvPr id="17" name="TextBox 16">
-              <a:extLst>
-                <a:ext uri="{FF2B5EF4-FFF2-40B4-BE49-F238E27FC236}">
-                  <a16:creationId xmlns:a16="http://schemas.microsoft.com/office/drawing/2014/main" id="{F3CBBDFB-F4FD-D8BC-8DD5-D87FB3AFD714}"/>
-                </a:ext>
-              </a:extLst>
-            </p:cNvPr>
-            <p:cNvSpPr txBox="1"/>
-            <p:nvPr/>
-          </p:nvSpPr>
-          <p:spPr>
-            <a:xfrm>
-              <a:off x="10160000" y="5186326"/>
-              <a:ext cx="711200" cy="369332"/>
-            </a:xfrm>
-            <a:prstGeom prst="rect">
-              <a:avLst/>
-            </a:prstGeom>
-            <a:noFill/>
-          </p:spPr>
-          <p:txBody>
-            <a:bodyPr wrap="square">
-              <a:spAutoFit/>
-            </a:bodyPr>
-            <a:lstStyle/>
-            <a:p>
-              <a:r>
-                <a:rPr lang="en-US" altLang="ko-KR" spc="-50" dirty="0"/>
-                <a:t>MR</a:t>
-              </a:r>
-              <a:r>
-                <a:rPr lang="en-US" altLang="ko-KR" spc="-50" baseline="30000" dirty="0"/>
-                <a:t>1</a:t>
-              </a:r>
-              <a:endParaRPr lang="ko-KR" altLang="en-US" baseline="30000" dirty="0"/>
-            </a:p>
-          </p:txBody>
-        </p:sp>
-        <p:sp>
-          <p:nvSpPr>
-            <p:cNvPr id="18" name="TextBox 17">
-              <a:extLst>
-                <a:ext uri="{FF2B5EF4-FFF2-40B4-BE49-F238E27FC236}">
-                  <a16:creationId xmlns:a16="http://schemas.microsoft.com/office/drawing/2014/main" id="{7B863288-B5DE-D7B9-C55E-65236BF1C29D}"/>
-                </a:ext>
-              </a:extLst>
-            </p:cNvPr>
-            <p:cNvSpPr txBox="1"/>
-            <p:nvPr/>
-          </p:nvSpPr>
-          <p:spPr>
-            <a:xfrm>
-              <a:off x="8502650" y="5095800"/>
-              <a:ext cx="711200" cy="369332"/>
-            </a:xfrm>
-            <a:prstGeom prst="rect">
-              <a:avLst/>
-            </a:prstGeom>
-            <a:noFill/>
-          </p:spPr>
-          <p:txBody>
-            <a:bodyPr wrap="square">
-              <a:spAutoFit/>
-            </a:bodyPr>
-            <a:lstStyle/>
-            <a:p>
-              <a:r>
-                <a:rPr lang="en-US" altLang="ko-KR" spc="-50" dirty="0"/>
-                <a:t>MR</a:t>
-              </a:r>
-              <a:endParaRPr lang="ko-KR" altLang="en-US" baseline="30000" dirty="0"/>
-            </a:p>
-          </p:txBody>
-        </p:sp>
-        <p:sp>
-          <p:nvSpPr>
-            <p:cNvPr id="19" name="TextBox 18">
-              <a:extLst>
-                <a:ext uri="{FF2B5EF4-FFF2-40B4-BE49-F238E27FC236}">
-                  <a16:creationId xmlns:a16="http://schemas.microsoft.com/office/drawing/2014/main" id="{79A6CE94-E00C-4C2F-BA29-51A5E2194BD0}"/>
-                </a:ext>
-              </a:extLst>
-            </p:cNvPr>
-            <p:cNvSpPr txBox="1"/>
-            <p:nvPr/>
-          </p:nvSpPr>
-          <p:spPr>
-            <a:xfrm>
-              <a:off x="5587999" y="1620166"/>
-              <a:ext cx="915830" cy="416031"/>
-            </a:xfrm>
-            <a:prstGeom prst="rect">
-              <a:avLst/>
-            </a:prstGeom>
-            <a:noFill/>
-          </p:spPr>
-          <p:txBody>
-            <a:bodyPr wrap="square">
-              <a:spAutoFit/>
-            </a:bodyPr>
-            <a:lstStyle/>
-            <a:p>
-              <a:r>
-                <a:rPr lang="en-US" altLang="ko-KR" spc="-50" dirty="0"/>
-                <a:t>D=AR</a:t>
-              </a:r>
-              <a:endParaRPr lang="ko-KR" altLang="en-US" baseline="30000" dirty="0"/>
-            </a:p>
-          </p:txBody>
-        </p:sp>
-      </p:grpSp>
       <mc:AlternateContent xmlns:mc="http://schemas.openxmlformats.org/markup-compatibility/2006" xmlns:a14="http://schemas.microsoft.com/office/drawing/2010/main">
         <mc:Choice Requires="a14">
           <p:sp>
@@ -19014,6 +18079,82 @@
           </p:sp>
         </mc:Fallback>
       </mc:AlternateContent>
+      <p:pic>
+        <p:nvPicPr>
+          <p:cNvPr id="21" name="그림 20">
+            <a:extLst>
+              <a:ext uri="{FF2B5EF4-FFF2-40B4-BE49-F238E27FC236}">
+                <a16:creationId xmlns:a16="http://schemas.microsoft.com/office/drawing/2014/main" id="{F464BC1D-A54E-1F53-2454-748E0E86FF18}"/>
+              </a:ext>
+            </a:extLst>
+          </p:cNvPr>
+          <p:cNvPicPr>
+            <a:picLocks noChangeAspect="1"/>
+          </p:cNvPicPr>
+          <p:nvPr/>
+        </p:nvPicPr>
+        <p:blipFill>
+          <a:blip r:embed="rId4"/>
+          <a:srcRect l="9756" t="12652" r="3511" b="1603"/>
+          <a:stretch>
+            <a:fillRect/>
+          </a:stretch>
+        </p:blipFill>
+        <p:spPr>
+          <a:xfrm>
+            <a:off x="5144782" y="1765417"/>
+            <a:ext cx="6465974" cy="4484382"/>
+          </a:xfrm>
+          <a:prstGeom prst="rect">
+            <a:avLst/>
+          </a:prstGeom>
+        </p:spPr>
+      </p:pic>
+      <p:sp>
+        <p:nvSpPr>
+          <p:cNvPr id="23" name="TextBox 22">
+            <a:extLst>
+              <a:ext uri="{FF2B5EF4-FFF2-40B4-BE49-F238E27FC236}">
+                <a16:creationId xmlns:a16="http://schemas.microsoft.com/office/drawing/2014/main" id="{AB4DE5B4-84B3-80A4-C598-EE05A731F52B}"/>
+              </a:ext>
+            </a:extLst>
+          </p:cNvPr>
+          <p:cNvSpPr txBox="1"/>
+          <p:nvPr/>
+        </p:nvSpPr>
+        <p:spPr>
+          <a:xfrm>
+            <a:off x="7880758" y="1488418"/>
+            <a:ext cx="2211198" cy="276999"/>
+          </a:xfrm>
+          <a:prstGeom prst="rect">
+            <a:avLst/>
+          </a:prstGeom>
+          <a:noFill/>
+        </p:spPr>
+        <p:txBody>
+          <a:bodyPr wrap="square">
+            <a:spAutoFit/>
+          </a:bodyPr>
+          <a:lstStyle/>
+          <a:p>
+            <a:pPr algn="ctr"/>
+            <a:r>
+              <a:rPr lang="en-US" altLang="ko-KR" sz="1200" spc="-50" dirty="0"/>
+              <a:t>&lt;</a:t>
+            </a:r>
+            <a:r>
+              <a:rPr lang="ko-KR" altLang="en-US" sz="1200" spc="-50" dirty="0"/>
+              <a:t>독점기업의 오염규제</a:t>
+            </a:r>
+            <a:r>
+              <a:rPr lang="en-US" altLang="ko-KR" sz="1200" spc="-50" dirty="0"/>
+              <a:t>&gt;</a:t>
+            </a:r>
+            <a:endParaRPr lang="ko-KR" altLang="en-US" sz="1400" dirty="0"/>
+          </a:p>
+        </p:txBody>
+      </p:sp>
     </p:spTree>
     <p:extLst>
       <p:ext uri="{BB962C8B-B14F-4D97-AF65-F5344CB8AC3E}">
@@ -19112,541 +18253,6 @@
           </a:p>
         </p:txBody>
       </p:sp>
-      <p:grpSp>
-        <p:nvGrpSpPr>
-          <p:cNvPr id="5" name="그룹 4">
-            <a:extLst>
-              <a:ext uri="{FF2B5EF4-FFF2-40B4-BE49-F238E27FC236}">
-                <a16:creationId xmlns:a16="http://schemas.microsoft.com/office/drawing/2014/main" id="{43AEB6E3-9FA9-7F6B-6077-7C893034F0C6}"/>
-              </a:ext>
-            </a:extLst>
-          </p:cNvPr>
-          <p:cNvGrpSpPr/>
-          <p:nvPr/>
-        </p:nvGrpSpPr>
-        <p:grpSpPr>
-          <a:xfrm>
-            <a:off x="5067300" y="1110049"/>
-            <a:ext cx="7124700" cy="5282078"/>
-            <a:chOff x="4089523" y="661950"/>
-            <a:chExt cx="7892927" cy="5949950"/>
-          </a:xfrm>
-        </p:grpSpPr>
-        <p:pic>
-          <p:nvPicPr>
-            <p:cNvPr id="6" name="그림 5" descr="라인, 텍스트, 도표, 그래프이(가) 표시된 사진&#10;&#10;AI 생성 콘텐츠는 정확하지 않을 수 있습니다.">
-              <a:extLst>
-                <a:ext uri="{FF2B5EF4-FFF2-40B4-BE49-F238E27FC236}">
-                  <a16:creationId xmlns:a16="http://schemas.microsoft.com/office/drawing/2014/main" id="{B38FC4FE-5D5B-A8E1-6C62-A6A14E3A6949}"/>
-                </a:ext>
-              </a:extLst>
-            </p:cNvPr>
-            <p:cNvPicPr>
-              <a:picLocks noChangeAspect="1"/>
-            </p:cNvPicPr>
-            <p:nvPr/>
-          </p:nvPicPr>
-          <p:blipFill>
-            <a:blip r:embed="rId2"/>
-            <a:stretch>
-              <a:fillRect/>
-            </a:stretch>
-          </p:blipFill>
-          <p:spPr>
-            <a:xfrm>
-              <a:off x="4089523" y="661950"/>
-              <a:ext cx="7657593" cy="5949950"/>
-            </a:xfrm>
-            <a:prstGeom prst="rect">
-              <a:avLst/>
-            </a:prstGeom>
-          </p:spPr>
-        </p:pic>
-        <p:sp>
-          <p:nvSpPr>
-            <p:cNvPr id="7" name="TextBox 6">
-              <a:extLst>
-                <a:ext uri="{FF2B5EF4-FFF2-40B4-BE49-F238E27FC236}">
-                  <a16:creationId xmlns:a16="http://schemas.microsoft.com/office/drawing/2014/main" id="{6FA004D5-CE89-0BB9-D3DF-9D5767BF2FB7}"/>
-                </a:ext>
-              </a:extLst>
-            </p:cNvPr>
-            <p:cNvSpPr txBox="1"/>
-            <p:nvPr/>
-          </p:nvSpPr>
-          <p:spPr>
-            <a:xfrm>
-              <a:off x="7035800" y="2398159"/>
-              <a:ext cx="254000" cy="369332"/>
-            </a:xfrm>
-            <a:prstGeom prst="rect">
-              <a:avLst/>
-            </a:prstGeom>
-            <a:noFill/>
-          </p:spPr>
-          <p:txBody>
-            <a:bodyPr wrap="square">
-              <a:spAutoFit/>
-            </a:bodyPr>
-            <a:lstStyle/>
-            <a:p>
-              <a:r>
-                <a:rPr lang="en-US" altLang="ko-KR" sz="1800" spc="-50" dirty="0"/>
-                <a:t>a</a:t>
-              </a:r>
-              <a:endParaRPr lang="ko-KR" altLang="en-US" dirty="0"/>
-            </a:p>
-          </p:txBody>
-        </p:sp>
-        <p:sp>
-          <p:nvSpPr>
-            <p:cNvPr id="8" name="TextBox 7">
-              <a:extLst>
-                <a:ext uri="{FF2B5EF4-FFF2-40B4-BE49-F238E27FC236}">
-                  <a16:creationId xmlns:a16="http://schemas.microsoft.com/office/drawing/2014/main" id="{23A9DBB8-834E-58D5-8811-0FF782249687}"/>
-                </a:ext>
-              </a:extLst>
-            </p:cNvPr>
-            <p:cNvSpPr txBox="1"/>
-            <p:nvPr/>
-          </p:nvSpPr>
-          <p:spPr>
-            <a:xfrm>
-              <a:off x="7035800" y="3598310"/>
-              <a:ext cx="254000" cy="369332"/>
-            </a:xfrm>
-            <a:prstGeom prst="rect">
-              <a:avLst/>
-            </a:prstGeom>
-            <a:noFill/>
-          </p:spPr>
-          <p:txBody>
-            <a:bodyPr wrap="square">
-              <a:spAutoFit/>
-            </a:bodyPr>
-            <a:lstStyle/>
-            <a:p>
-              <a:r>
-                <a:rPr lang="en-US" altLang="ko-KR" sz="1800" spc="-50" dirty="0"/>
-                <a:t>b</a:t>
-              </a:r>
-              <a:endParaRPr lang="ko-KR" altLang="en-US" dirty="0"/>
-            </a:p>
-          </p:txBody>
-        </p:sp>
-        <p:sp>
-          <p:nvSpPr>
-            <p:cNvPr id="9" name="TextBox 8">
-              <a:extLst>
-                <a:ext uri="{FF2B5EF4-FFF2-40B4-BE49-F238E27FC236}">
-                  <a16:creationId xmlns:a16="http://schemas.microsoft.com/office/drawing/2014/main" id="{2BBD89D1-33F8-949B-C395-DDD31353CA80}"/>
-                </a:ext>
-              </a:extLst>
-            </p:cNvPr>
-            <p:cNvSpPr txBox="1"/>
-            <p:nvPr/>
-          </p:nvSpPr>
-          <p:spPr>
-            <a:xfrm>
-              <a:off x="8007350" y="3598310"/>
-              <a:ext cx="254000" cy="369332"/>
-            </a:xfrm>
-            <a:prstGeom prst="rect">
-              <a:avLst/>
-            </a:prstGeom>
-            <a:noFill/>
-          </p:spPr>
-          <p:txBody>
-            <a:bodyPr wrap="square">
-              <a:spAutoFit/>
-            </a:bodyPr>
-            <a:lstStyle/>
-            <a:p>
-              <a:r>
-                <a:rPr lang="en-US" altLang="ko-KR" sz="1800" spc="-50" dirty="0"/>
-                <a:t>g</a:t>
-              </a:r>
-              <a:endParaRPr lang="ko-KR" altLang="en-US" dirty="0"/>
-            </a:p>
-          </p:txBody>
-        </p:sp>
-        <p:sp>
-          <p:nvSpPr>
-            <p:cNvPr id="10" name="TextBox 9">
-              <a:extLst>
-                <a:ext uri="{FF2B5EF4-FFF2-40B4-BE49-F238E27FC236}">
-                  <a16:creationId xmlns:a16="http://schemas.microsoft.com/office/drawing/2014/main" id="{B7129AAF-AFF7-66A2-2F72-34068B76E212}"/>
-                </a:ext>
-              </a:extLst>
-            </p:cNvPr>
-            <p:cNvSpPr txBox="1"/>
-            <p:nvPr/>
-          </p:nvSpPr>
-          <p:spPr>
-            <a:xfrm>
-              <a:off x="7035800" y="2863610"/>
-              <a:ext cx="254000" cy="369332"/>
-            </a:xfrm>
-            <a:prstGeom prst="rect">
-              <a:avLst/>
-            </a:prstGeom>
-            <a:noFill/>
-          </p:spPr>
-          <p:txBody>
-            <a:bodyPr wrap="square">
-              <a:spAutoFit/>
-            </a:bodyPr>
-            <a:lstStyle/>
-            <a:p>
-              <a:r>
-                <a:rPr lang="en-US" altLang="ko-KR" dirty="0"/>
-                <a:t>f</a:t>
-              </a:r>
-              <a:endParaRPr lang="ko-KR" altLang="en-US" dirty="0"/>
-            </a:p>
-          </p:txBody>
-        </p:sp>
-        <p:sp>
-          <p:nvSpPr>
-            <p:cNvPr id="11" name="TextBox 10">
-              <a:extLst>
-                <a:ext uri="{FF2B5EF4-FFF2-40B4-BE49-F238E27FC236}">
-                  <a16:creationId xmlns:a16="http://schemas.microsoft.com/office/drawing/2014/main" id="{1DE7960B-08BE-A699-AB3E-D3EE8521F26C}"/>
-                </a:ext>
-              </a:extLst>
-            </p:cNvPr>
-            <p:cNvSpPr txBox="1"/>
-            <p:nvPr/>
-          </p:nvSpPr>
-          <p:spPr>
-            <a:xfrm>
-              <a:off x="8007350" y="2866270"/>
-              <a:ext cx="254000" cy="369332"/>
-            </a:xfrm>
-            <a:prstGeom prst="rect">
-              <a:avLst/>
-            </a:prstGeom>
-            <a:noFill/>
-          </p:spPr>
-          <p:txBody>
-            <a:bodyPr wrap="square">
-              <a:spAutoFit/>
-            </a:bodyPr>
-            <a:lstStyle/>
-            <a:p>
-              <a:r>
-                <a:rPr lang="en-US" altLang="ko-KR" spc="-50" dirty="0"/>
-                <a:t>d</a:t>
-              </a:r>
-              <a:endParaRPr lang="ko-KR" altLang="en-US" dirty="0"/>
-            </a:p>
-          </p:txBody>
-        </p:sp>
-        <p:sp>
-          <p:nvSpPr>
-            <p:cNvPr id="12" name="TextBox 11">
-              <a:extLst>
-                <a:ext uri="{FF2B5EF4-FFF2-40B4-BE49-F238E27FC236}">
-                  <a16:creationId xmlns:a16="http://schemas.microsoft.com/office/drawing/2014/main" id="{D3AF7F61-68B3-3E59-9266-3A148D8D2CC4}"/>
-                </a:ext>
-              </a:extLst>
-            </p:cNvPr>
-            <p:cNvSpPr txBox="1"/>
-            <p:nvPr/>
-          </p:nvSpPr>
-          <p:spPr>
-            <a:xfrm>
-              <a:off x="9379142" y="3598310"/>
-              <a:ext cx="254000" cy="369332"/>
-            </a:xfrm>
-            <a:prstGeom prst="rect">
-              <a:avLst/>
-            </a:prstGeom>
-            <a:noFill/>
-          </p:spPr>
-          <p:txBody>
-            <a:bodyPr wrap="square">
-              <a:spAutoFit/>
-            </a:bodyPr>
-            <a:lstStyle/>
-            <a:p>
-              <a:r>
-                <a:rPr lang="en-US" altLang="ko-KR" sz="1800" spc="-50" dirty="0"/>
-                <a:t>c</a:t>
-              </a:r>
-              <a:endParaRPr lang="ko-KR" altLang="en-US" dirty="0"/>
-            </a:p>
-          </p:txBody>
-        </p:sp>
-        <p:sp>
-          <p:nvSpPr>
-            <p:cNvPr id="13" name="TextBox 12">
-              <a:extLst>
-                <a:ext uri="{FF2B5EF4-FFF2-40B4-BE49-F238E27FC236}">
-                  <a16:creationId xmlns:a16="http://schemas.microsoft.com/office/drawing/2014/main" id="{15BA1DAB-4717-42ED-86C3-9523E873EAC9}"/>
-                </a:ext>
-              </a:extLst>
-            </p:cNvPr>
-            <p:cNvSpPr txBox="1"/>
-            <p:nvPr/>
-          </p:nvSpPr>
-          <p:spPr>
-            <a:xfrm>
-              <a:off x="8007350" y="4525410"/>
-              <a:ext cx="254000" cy="369332"/>
-            </a:xfrm>
-            <a:prstGeom prst="rect">
-              <a:avLst/>
-            </a:prstGeom>
-            <a:noFill/>
-          </p:spPr>
-          <p:txBody>
-            <a:bodyPr wrap="square">
-              <a:spAutoFit/>
-            </a:bodyPr>
-            <a:lstStyle/>
-            <a:p>
-              <a:r>
-                <a:rPr lang="en-US" altLang="ko-KR" sz="1800" spc="-50" dirty="0"/>
-                <a:t>e</a:t>
-              </a:r>
-              <a:endParaRPr lang="ko-KR" altLang="en-US" dirty="0"/>
-            </a:p>
-          </p:txBody>
-        </p:sp>
-        <p:sp>
-          <p:nvSpPr>
-            <p:cNvPr id="14" name="TextBox 13">
-              <a:extLst>
-                <a:ext uri="{FF2B5EF4-FFF2-40B4-BE49-F238E27FC236}">
-                  <a16:creationId xmlns:a16="http://schemas.microsoft.com/office/drawing/2014/main" id="{27FBE1E7-1E9D-DE9D-8A28-63F6472BE00B}"/>
-                </a:ext>
-              </a:extLst>
-            </p:cNvPr>
-            <p:cNvSpPr txBox="1"/>
-            <p:nvPr/>
-          </p:nvSpPr>
-          <p:spPr>
-            <a:xfrm>
-              <a:off x="11271250" y="2967830"/>
-              <a:ext cx="711200" cy="369332"/>
-            </a:xfrm>
-            <a:prstGeom prst="rect">
-              <a:avLst/>
-            </a:prstGeom>
-            <a:noFill/>
-          </p:spPr>
-          <p:txBody>
-            <a:bodyPr wrap="square">
-              <a:spAutoFit/>
-            </a:bodyPr>
-            <a:lstStyle/>
-            <a:p>
-              <a:r>
-                <a:rPr lang="en-US" altLang="ko-KR" spc="-50" dirty="0"/>
-                <a:t>MC</a:t>
-              </a:r>
-              <a:r>
-                <a:rPr lang="en-US" altLang="ko-KR" spc="-50" baseline="-25000" dirty="0"/>
-                <a:t>s</a:t>
-              </a:r>
-              <a:endParaRPr lang="ko-KR" altLang="en-US" baseline="-25000" dirty="0"/>
-            </a:p>
-          </p:txBody>
-        </p:sp>
-        <p:sp>
-          <p:nvSpPr>
-            <p:cNvPr id="15" name="TextBox 14">
-              <a:extLst>
-                <a:ext uri="{FF2B5EF4-FFF2-40B4-BE49-F238E27FC236}">
-                  <a16:creationId xmlns:a16="http://schemas.microsoft.com/office/drawing/2014/main" id="{EA4129BA-0B0A-D095-7B4D-AD824D8DEAD3}"/>
-                </a:ext>
-              </a:extLst>
-            </p:cNvPr>
-            <p:cNvSpPr txBox="1"/>
-            <p:nvPr/>
-          </p:nvSpPr>
-          <p:spPr>
-            <a:xfrm>
-              <a:off x="11271250" y="3690587"/>
-              <a:ext cx="711200" cy="369332"/>
-            </a:xfrm>
-            <a:prstGeom prst="rect">
-              <a:avLst/>
-            </a:prstGeom>
-            <a:noFill/>
-          </p:spPr>
-          <p:txBody>
-            <a:bodyPr wrap="square">
-              <a:spAutoFit/>
-            </a:bodyPr>
-            <a:lstStyle/>
-            <a:p>
-              <a:r>
-                <a:rPr lang="en-US" altLang="ko-KR" spc="-50" dirty="0"/>
-                <a:t>MC</a:t>
-              </a:r>
-              <a:r>
-                <a:rPr lang="en-US" altLang="ko-KR" spc="-50" baseline="-25000" dirty="0"/>
-                <a:t>P</a:t>
-              </a:r>
-              <a:endParaRPr lang="ko-KR" altLang="en-US" baseline="-25000" dirty="0"/>
-            </a:p>
-          </p:txBody>
-        </p:sp>
-        <p:sp>
-          <p:nvSpPr>
-            <p:cNvPr id="16" name="TextBox 15">
-              <a:extLst>
-                <a:ext uri="{FF2B5EF4-FFF2-40B4-BE49-F238E27FC236}">
-                  <a16:creationId xmlns:a16="http://schemas.microsoft.com/office/drawing/2014/main" id="{B70064B0-98C5-49A1-9164-34A72E7F60C4}"/>
-                </a:ext>
-              </a:extLst>
-            </p:cNvPr>
-            <p:cNvSpPr txBox="1"/>
-            <p:nvPr/>
-          </p:nvSpPr>
-          <p:spPr>
-            <a:xfrm>
-              <a:off x="11271250" y="4710076"/>
-              <a:ext cx="711200" cy="369332"/>
-            </a:xfrm>
-            <a:prstGeom prst="rect">
-              <a:avLst/>
-            </a:prstGeom>
-            <a:noFill/>
-          </p:spPr>
-          <p:txBody>
-            <a:bodyPr wrap="square">
-              <a:spAutoFit/>
-            </a:bodyPr>
-            <a:lstStyle/>
-            <a:p>
-              <a:r>
-                <a:rPr lang="en-US" altLang="ko-KR" spc="-50" dirty="0"/>
-                <a:t>MC</a:t>
-              </a:r>
-              <a:r>
-                <a:rPr lang="en-US" altLang="ko-KR" spc="-50" baseline="30000" dirty="0"/>
-                <a:t>*</a:t>
-              </a:r>
-              <a:endParaRPr lang="ko-KR" altLang="en-US" baseline="30000" dirty="0"/>
-            </a:p>
-          </p:txBody>
-        </p:sp>
-        <p:sp>
-          <p:nvSpPr>
-            <p:cNvPr id="17" name="TextBox 16">
-              <a:extLst>
-                <a:ext uri="{FF2B5EF4-FFF2-40B4-BE49-F238E27FC236}">
-                  <a16:creationId xmlns:a16="http://schemas.microsoft.com/office/drawing/2014/main" id="{14C693D0-1A36-7BFA-40C0-991DABC64EAC}"/>
-                </a:ext>
-              </a:extLst>
-            </p:cNvPr>
-            <p:cNvSpPr txBox="1"/>
-            <p:nvPr/>
-          </p:nvSpPr>
-          <p:spPr>
-            <a:xfrm>
-              <a:off x="10160000" y="5186326"/>
-              <a:ext cx="711200" cy="369332"/>
-            </a:xfrm>
-            <a:prstGeom prst="rect">
-              <a:avLst/>
-            </a:prstGeom>
-            <a:noFill/>
-          </p:spPr>
-          <p:txBody>
-            <a:bodyPr wrap="square">
-              <a:spAutoFit/>
-            </a:bodyPr>
-            <a:lstStyle/>
-            <a:p>
-              <a:r>
-                <a:rPr lang="en-US" altLang="ko-KR" spc="-50" dirty="0"/>
-                <a:t>MR</a:t>
-              </a:r>
-              <a:r>
-                <a:rPr lang="en-US" altLang="ko-KR" spc="-50" baseline="30000" dirty="0"/>
-                <a:t>1</a:t>
-              </a:r>
-              <a:endParaRPr lang="ko-KR" altLang="en-US" baseline="30000" dirty="0"/>
-            </a:p>
-          </p:txBody>
-        </p:sp>
-        <p:sp>
-          <p:nvSpPr>
-            <p:cNvPr id="18" name="TextBox 17">
-              <a:extLst>
-                <a:ext uri="{FF2B5EF4-FFF2-40B4-BE49-F238E27FC236}">
-                  <a16:creationId xmlns:a16="http://schemas.microsoft.com/office/drawing/2014/main" id="{C3B53D7F-8014-ADDB-CF5C-9AA5AF222FB4}"/>
-                </a:ext>
-              </a:extLst>
-            </p:cNvPr>
-            <p:cNvSpPr txBox="1"/>
-            <p:nvPr/>
-          </p:nvSpPr>
-          <p:spPr>
-            <a:xfrm>
-              <a:off x="8502650" y="5095800"/>
-              <a:ext cx="711200" cy="369332"/>
-            </a:xfrm>
-            <a:prstGeom prst="rect">
-              <a:avLst/>
-            </a:prstGeom>
-            <a:noFill/>
-          </p:spPr>
-          <p:txBody>
-            <a:bodyPr wrap="square">
-              <a:spAutoFit/>
-            </a:bodyPr>
-            <a:lstStyle/>
-            <a:p>
-              <a:r>
-                <a:rPr lang="en-US" altLang="ko-KR" spc="-50" dirty="0"/>
-                <a:t>MR</a:t>
-              </a:r>
-              <a:endParaRPr lang="ko-KR" altLang="en-US" baseline="30000" dirty="0"/>
-            </a:p>
-          </p:txBody>
-        </p:sp>
-        <p:sp>
-          <p:nvSpPr>
-            <p:cNvPr id="19" name="TextBox 18">
-              <a:extLst>
-                <a:ext uri="{FF2B5EF4-FFF2-40B4-BE49-F238E27FC236}">
-                  <a16:creationId xmlns:a16="http://schemas.microsoft.com/office/drawing/2014/main" id="{1643F99B-579B-62D1-17E4-C8204F687B74}"/>
-                </a:ext>
-              </a:extLst>
-            </p:cNvPr>
-            <p:cNvSpPr txBox="1"/>
-            <p:nvPr/>
-          </p:nvSpPr>
-          <p:spPr>
-            <a:xfrm>
-              <a:off x="5587999" y="1620166"/>
-              <a:ext cx="915830" cy="416031"/>
-            </a:xfrm>
-            <a:prstGeom prst="rect">
-              <a:avLst/>
-            </a:prstGeom>
-            <a:noFill/>
-          </p:spPr>
-          <p:txBody>
-            <a:bodyPr wrap="square">
-              <a:spAutoFit/>
-            </a:bodyPr>
-            <a:lstStyle/>
-            <a:p>
-              <a:r>
-                <a:rPr lang="en-US" altLang="ko-KR" spc="-50" dirty="0"/>
-                <a:t>D=AR</a:t>
-              </a:r>
-              <a:endParaRPr lang="ko-KR" altLang="en-US" baseline="30000" dirty="0"/>
-            </a:p>
-          </p:txBody>
-        </p:sp>
-      </p:grpSp>
       <mc:AlternateContent xmlns:mc="http://schemas.openxmlformats.org/markup-compatibility/2006" xmlns:a14="http://schemas.microsoft.com/office/drawing/2010/main">
         <mc:Choice Requires="a14">
           <p:sp>
@@ -20312,6 +18918,82 @@
           </p:sp>
         </mc:Fallback>
       </mc:AlternateContent>
+      <p:pic>
+        <p:nvPicPr>
+          <p:cNvPr id="21" name="그림 20">
+            <a:extLst>
+              <a:ext uri="{FF2B5EF4-FFF2-40B4-BE49-F238E27FC236}">
+                <a16:creationId xmlns:a16="http://schemas.microsoft.com/office/drawing/2014/main" id="{4AB3CBB2-78AF-C221-C50E-76BFDEE484C9}"/>
+              </a:ext>
+            </a:extLst>
+          </p:cNvPr>
+          <p:cNvPicPr>
+            <a:picLocks noChangeAspect="1"/>
+          </p:cNvPicPr>
+          <p:nvPr/>
+        </p:nvPicPr>
+        <p:blipFill>
+          <a:blip r:embed="rId4"/>
+          <a:srcRect l="9756" t="12652" r="3511" b="1603"/>
+          <a:stretch>
+            <a:fillRect/>
+          </a:stretch>
+        </p:blipFill>
+        <p:spPr>
+          <a:xfrm>
+            <a:off x="5144782" y="1765417"/>
+            <a:ext cx="6465974" cy="4484382"/>
+          </a:xfrm>
+          <a:prstGeom prst="rect">
+            <a:avLst/>
+          </a:prstGeom>
+        </p:spPr>
+      </p:pic>
+      <p:sp>
+        <p:nvSpPr>
+          <p:cNvPr id="23" name="TextBox 22">
+            <a:extLst>
+              <a:ext uri="{FF2B5EF4-FFF2-40B4-BE49-F238E27FC236}">
+                <a16:creationId xmlns:a16="http://schemas.microsoft.com/office/drawing/2014/main" id="{C9C89AA9-A11D-7CBB-3401-2E0F47F4341B}"/>
+              </a:ext>
+            </a:extLst>
+          </p:cNvPr>
+          <p:cNvSpPr txBox="1"/>
+          <p:nvPr/>
+        </p:nvSpPr>
+        <p:spPr>
+          <a:xfrm>
+            <a:off x="7880758" y="1488418"/>
+            <a:ext cx="2211198" cy="276999"/>
+          </a:xfrm>
+          <a:prstGeom prst="rect">
+            <a:avLst/>
+          </a:prstGeom>
+          <a:noFill/>
+        </p:spPr>
+        <p:txBody>
+          <a:bodyPr wrap="square">
+            <a:spAutoFit/>
+          </a:bodyPr>
+          <a:lstStyle/>
+          <a:p>
+            <a:pPr algn="ctr"/>
+            <a:r>
+              <a:rPr lang="en-US" altLang="ko-KR" sz="1200" spc="-50" dirty="0"/>
+              <a:t>&lt;</a:t>
+            </a:r>
+            <a:r>
+              <a:rPr lang="ko-KR" altLang="en-US" sz="1200" spc="-50" dirty="0"/>
+              <a:t>독점기업의 오염규제</a:t>
+            </a:r>
+            <a:r>
+              <a:rPr lang="en-US" altLang="ko-KR" sz="1200" spc="-50" dirty="0"/>
+              <a:t>&gt;</a:t>
+            </a:r>
+            <a:endParaRPr lang="ko-KR" altLang="en-US" sz="1400" dirty="0"/>
+          </a:p>
+        </p:txBody>
+      </p:sp>
     </p:spTree>
     <p:extLst>
       <p:ext uri="{BB962C8B-B14F-4D97-AF65-F5344CB8AC3E}">
@@ -21110,8 +19792,8 @@
           </a:p>
         </p:txBody>
       </p:sp>
-      <mc:AlternateContent xmlns:mc="http://schemas.openxmlformats.org/markup-compatibility/2006">
-        <mc:Choice xmlns:a14="http://schemas.microsoft.com/office/drawing/2010/main" Requires="a14">
+      <mc:AlternateContent xmlns:mc="http://schemas.openxmlformats.org/markup-compatibility/2006" xmlns:a14="http://schemas.microsoft.com/office/drawing/2010/main">
+        <mc:Choice Requires="a14">
           <p:sp>
             <p:nvSpPr>
               <p:cNvPr id="5" name="TextBox 4">
@@ -21352,7 +20034,7 @@
             </p:txBody>
           </p:sp>
         </mc:Choice>
-        <mc:Fallback>
+        <mc:Fallback xmlns="">
           <p:sp>
             <p:nvSpPr>
               <p:cNvPr id="5" name="TextBox 4">
@@ -21595,8 +20277,8 @@
           </a:p>
         </p:txBody>
       </p:sp>
-      <mc:AlternateContent xmlns:mc="http://schemas.openxmlformats.org/markup-compatibility/2006">
-        <mc:Choice xmlns:a14="http://schemas.microsoft.com/office/drawing/2010/main" Requires="a14">
+      <mc:AlternateContent xmlns:mc="http://schemas.openxmlformats.org/markup-compatibility/2006" xmlns:a14="http://schemas.microsoft.com/office/drawing/2010/main">
+        <mc:Choice Requires="a14">
           <p:sp>
             <p:nvSpPr>
               <p:cNvPr id="5" name="TextBox 4">
@@ -22509,7 +21191,7 @@
             </p:txBody>
           </p:sp>
         </mc:Choice>
-        <mc:Fallback>
+        <mc:Fallback xmlns="">
           <p:sp>
             <p:nvSpPr>
               <p:cNvPr id="5" name="TextBox 4">
@@ -22806,8 +21488,8 @@
           </a:p>
         </p:txBody>
       </p:sp>
-      <mc:AlternateContent xmlns:mc="http://schemas.openxmlformats.org/markup-compatibility/2006">
-        <mc:Choice xmlns:a14="http://schemas.microsoft.com/office/drawing/2010/main" Requires="a14">
+      <mc:AlternateContent xmlns:mc="http://schemas.openxmlformats.org/markup-compatibility/2006" xmlns:a14="http://schemas.microsoft.com/office/drawing/2010/main">
+        <mc:Choice Requires="a14">
           <p:sp>
             <p:nvSpPr>
               <p:cNvPr id="9" name="TextBox 8">
@@ -23166,7 +21848,7 @@
             </p:txBody>
           </p:sp>
         </mc:Choice>
-        <mc:Fallback>
+        <mc:Fallback xmlns="">
           <p:sp>
             <p:nvSpPr>
               <p:cNvPr id="9" name="TextBox 8">
@@ -23211,8 +21893,8 @@
           </p:sp>
         </mc:Fallback>
       </mc:AlternateContent>
-      <mc:AlternateContent xmlns:mc="http://schemas.openxmlformats.org/markup-compatibility/2006">
-        <mc:Choice xmlns:a14="http://schemas.microsoft.com/office/drawing/2010/main" Requires="a14">
+      <mc:AlternateContent xmlns:mc="http://schemas.openxmlformats.org/markup-compatibility/2006" xmlns:a14="http://schemas.microsoft.com/office/drawing/2010/main">
+        <mc:Choice Requires="a14">
           <p:sp>
             <p:nvSpPr>
               <p:cNvPr id="10" name="TextBox 9">
@@ -23463,7 +22145,7 @@
             </p:txBody>
           </p:sp>
         </mc:Choice>
-        <mc:Fallback>
+        <mc:Fallback xmlns="">
           <p:sp>
             <p:nvSpPr>
               <p:cNvPr id="10" name="TextBox 9">
@@ -23654,8 +22336,8 @@
           </a:p>
         </p:txBody>
       </p:sp>
-      <mc:AlternateContent xmlns:mc="http://schemas.openxmlformats.org/markup-compatibility/2006">
-        <mc:Choice xmlns:a14="http://schemas.microsoft.com/office/drawing/2010/main" Requires="a14">
+      <mc:AlternateContent xmlns:mc="http://schemas.openxmlformats.org/markup-compatibility/2006" xmlns:a14="http://schemas.microsoft.com/office/drawing/2010/main">
+        <mc:Choice Requires="a14">
           <p:sp>
             <p:nvSpPr>
               <p:cNvPr id="9" name="TextBox 8">
@@ -24200,7 +22882,7 @@
             </p:txBody>
           </p:sp>
         </mc:Choice>
-        <mc:Fallback>
+        <mc:Fallback xmlns="">
           <p:sp>
             <p:nvSpPr>
               <p:cNvPr id="9" name="TextBox 8">
@@ -24640,8 +23322,8 @@
           </a:p>
         </p:txBody>
       </p:sp>
-      <mc:AlternateContent xmlns:mc="http://schemas.openxmlformats.org/markup-compatibility/2006">
-        <mc:Choice xmlns:a14="http://schemas.microsoft.com/office/drawing/2010/main" Requires="a14">
+      <mc:AlternateContent xmlns:mc="http://schemas.openxmlformats.org/markup-compatibility/2006" xmlns:a14="http://schemas.microsoft.com/office/drawing/2010/main">
+        <mc:Choice Requires="a14">
           <p:sp>
             <p:nvSpPr>
               <p:cNvPr id="9" name="TextBox 8">
@@ -25189,7 +23871,7 @@
             </p:txBody>
           </p:sp>
         </mc:Choice>
-        <mc:Fallback>
+        <mc:Fallback xmlns="">
           <p:sp>
             <p:nvSpPr>
               <p:cNvPr id="9" name="TextBox 8">

--- a/환경경제학/2026-1/환경경제학_Chapter_07 (Section2부터).pptx
+++ b/환경경제학/2026-1/환경경제학_Chapter_07 (Section2부터).pptx
@@ -8661,8 +8661,8 @@
           </a:p>
         </p:txBody>
       </p:sp>
-      <mc:AlternateContent xmlns:mc="http://schemas.openxmlformats.org/markup-compatibility/2006">
-        <mc:Choice xmlns:a14="http://schemas.microsoft.com/office/drawing/2010/main" Requires="a14">
+      <mc:AlternateContent xmlns:mc="http://schemas.openxmlformats.org/markup-compatibility/2006" xmlns:a14="http://schemas.microsoft.com/office/drawing/2010/main">
+        <mc:Choice Requires="a14">
           <p:sp>
             <p:nvSpPr>
               <p:cNvPr id="6" name="TextBox 5">
@@ -9245,7 +9245,7 @@
             </p:txBody>
           </p:sp>
         </mc:Choice>
-        <mc:Fallback>
+        <mc:Fallback xmlns="">
           <p:sp>
             <p:nvSpPr>
               <p:cNvPr id="6" name="TextBox 5">
@@ -10705,6 +10705,66 @@
           <a:chExt cx="0" cy="0"/>
         </a:xfrm>
       </p:grpSpPr>
+      <p:pic>
+        <p:nvPicPr>
+          <p:cNvPr id="6" name="그림 7" descr="Cap 2014-06-19 09-44-15-042.png">
+            <a:extLst>
+              <a:ext uri="{FF2B5EF4-FFF2-40B4-BE49-F238E27FC236}">
+                <a16:creationId xmlns:a16="http://schemas.microsoft.com/office/drawing/2014/main" id="{FAFE12DB-6B11-83A2-90D3-E17D0128F8D8}"/>
+              </a:ext>
+            </a:extLst>
+          </p:cNvPr>
+          <p:cNvPicPr>
+            <a:picLocks noChangeAspect="1"/>
+          </p:cNvPicPr>
+          <p:nvPr/>
+        </p:nvPicPr>
+        <p:blipFill rotWithShape="1">
+          <a:blip r:embed="rId3">
+            <a:extLst>
+              <a:ext uri="{28A0092B-C50C-407E-A947-70E740481C1C}">
+                <a14:useLocalDpi xmlns:a14="http://schemas.microsoft.com/office/drawing/2010/main" val="0"/>
+              </a:ext>
+            </a:extLst>
+          </a:blip>
+          <a:srcRect l="7158" t="11638" r="7717" b="1758"/>
+          <a:stretch>
+            <a:fillRect/>
+          </a:stretch>
+        </p:blipFill>
+        <p:spPr bwMode="auto">
+          <a:xfrm>
+            <a:off x="7208574" y="2775626"/>
+            <a:ext cx="4741451" cy="2665377"/>
+          </a:xfrm>
+          <a:prstGeom prst="rect">
+            <a:avLst/>
+          </a:prstGeom>
+          <a:noFill/>
+          <a:ln>
+            <a:noFill/>
+          </a:ln>
+          <a:extLst>
+            <a:ext uri="{909E8E84-426E-40DD-AFC4-6F175D3DCCD1}">
+              <a14:hiddenFill xmlns:a14="http://schemas.microsoft.com/office/drawing/2010/main">
+                <a:solidFill>
+                  <a:srgbClr val="FFFFFF"/>
+                </a:solidFill>
+              </a14:hiddenFill>
+            </a:ext>
+            <a:ext uri="{91240B29-F687-4F45-9708-019B960494DF}">
+              <a14:hiddenLine xmlns:a14="http://schemas.microsoft.com/office/drawing/2010/main" w="9525">
+                <a:solidFill>
+                  <a:srgbClr val="000000"/>
+                </a:solidFill>
+                <a:miter lim="800000"/>
+                <a:headEnd/>
+                <a:tailEnd/>
+              </a14:hiddenLine>
+            </a:ext>
+          </a:extLst>
+        </p:spPr>
+      </p:pic>
       <p:sp>
         <p:nvSpPr>
           <p:cNvPr id="2" name="제목 1">
@@ -11358,66 +11418,6 @@
           </p:sp>
         </mc:Fallback>
       </mc:AlternateContent>
-      <p:pic>
-        <p:nvPicPr>
-          <p:cNvPr id="6" name="그림 7" descr="Cap 2014-06-19 09-44-15-042.png">
-            <a:extLst>
-              <a:ext uri="{FF2B5EF4-FFF2-40B4-BE49-F238E27FC236}">
-                <a16:creationId xmlns:a16="http://schemas.microsoft.com/office/drawing/2014/main" id="{FAFE12DB-6B11-83A2-90D3-E17D0128F8D8}"/>
-              </a:ext>
-            </a:extLst>
-          </p:cNvPr>
-          <p:cNvPicPr>
-            <a:picLocks noChangeAspect="1"/>
-          </p:cNvPicPr>
-          <p:nvPr/>
-        </p:nvPicPr>
-        <p:blipFill rotWithShape="1">
-          <a:blip r:embed="rId5">
-            <a:extLst>
-              <a:ext uri="{28A0092B-C50C-407E-A947-70E740481C1C}">
-                <a14:useLocalDpi xmlns:a14="http://schemas.microsoft.com/office/drawing/2010/main" val="0"/>
-              </a:ext>
-            </a:extLst>
-          </a:blip>
-          <a:srcRect l="7158" t="11638" r="7717" b="1758"/>
-          <a:stretch>
-            <a:fillRect/>
-          </a:stretch>
-        </p:blipFill>
-        <p:spPr bwMode="auto">
-          <a:xfrm>
-            <a:off x="7478553" y="2787416"/>
-            <a:ext cx="4301306" cy="2417952"/>
-          </a:xfrm>
-          <a:prstGeom prst="rect">
-            <a:avLst/>
-          </a:prstGeom>
-          <a:noFill/>
-          <a:ln>
-            <a:noFill/>
-          </a:ln>
-          <a:extLst>
-            <a:ext uri="{909E8E84-426E-40DD-AFC4-6F175D3DCCD1}">
-              <a14:hiddenFill xmlns:a14="http://schemas.microsoft.com/office/drawing/2010/main">
-                <a:solidFill>
-                  <a:srgbClr val="FFFFFF"/>
-                </a:solidFill>
-              </a14:hiddenFill>
-            </a:ext>
-            <a:ext uri="{91240B29-F687-4F45-9708-019B960494DF}">
-              <a14:hiddenLine xmlns:a14="http://schemas.microsoft.com/office/drawing/2010/main" w="9525">
-                <a:solidFill>
-                  <a:srgbClr val="000000"/>
-                </a:solidFill>
-                <a:miter lim="800000"/>
-                <a:headEnd/>
-                <a:tailEnd/>
-              </a14:hiddenLine>
-            </a:ext>
-          </a:extLst>
-        </p:spPr>
-      </p:pic>
       <p:sp>
         <p:nvSpPr>
           <p:cNvPr id="9" name="TextBox 8">
@@ -11616,8 +11616,8 @@
           </a:p>
         </p:txBody>
       </p:sp>
-      <mc:AlternateContent xmlns:mc="http://schemas.openxmlformats.org/markup-compatibility/2006" xmlns:a14="http://schemas.microsoft.com/office/drawing/2010/main">
-        <mc:Choice Requires="a14">
+      <mc:AlternateContent xmlns:mc="http://schemas.openxmlformats.org/markup-compatibility/2006">
+        <mc:Choice xmlns:a14="http://schemas.microsoft.com/office/drawing/2010/main" Requires="a14">
           <p:sp>
             <p:nvSpPr>
               <p:cNvPr id="7" name="TextBox 6">
@@ -11992,9 +11992,20 @@
                 </a:r>
                 <a:r>
                   <a:rPr lang="ko-KR" altLang="en-US" sz="1600" spc="-50" dirty="0"/>
-                  <a:t>이하로 배출을 하게 되면 보조금이 한계저감비용보다 작기 때문임</a:t>
-                </a:r>
-                <a:endParaRPr lang="en-US" altLang="ko-KR" sz="1600" spc="-50" dirty="0"/>
+                  <a:t>이하로 배출을 하게 되면 보조금이 한계저감비용보다 작기 때문에</a:t>
+                </a:r>
+                <a:r>
+                  <a:rPr lang="en-US" altLang="ko-KR" sz="1600" spc="-50" dirty="0"/>
+                  <a:t>, </a:t>
+                </a:r>
+                <a:r>
+                  <a:rPr lang="ko-KR" altLang="en-US" sz="1600" spc="-50" dirty="0"/>
+                  <a:t>배출을 늘리려는 유인이 생긴다</a:t>
+                </a:r>
+                <a:r>
+                  <a:rPr lang="en-US" altLang="ko-KR" sz="1600" spc="-50" dirty="0"/>
+                  <a:t>.</a:t>
+                </a:r>
               </a:p>
               <a:p>
                 <a:pPr marL="377825" indent="-285750">
@@ -12013,7 +12024,7 @@
             </p:txBody>
           </p:sp>
         </mc:Choice>
-        <mc:Fallback xmlns="">
+        <mc:Fallback>
           <p:sp>
             <p:nvSpPr>
               <p:cNvPr id="7" name="TextBox 6">
@@ -12211,7 +12222,7 @@
         <p:spPr>
           <a:xfrm>
             <a:off x="678873" y="958844"/>
-            <a:ext cx="11303577" cy="4846007"/>
+            <a:ext cx="11303577" cy="5215338"/>
           </a:xfrm>
           <a:prstGeom prst="rect">
             <a:avLst/>
@@ -12390,7 +12401,63 @@
               <a:buFont typeface="Wingdings" panose="05000000000000000000" pitchFamily="2" charset="2"/>
               <a:buChar char="ü"/>
             </a:pPr>
-            <a:endParaRPr lang="en-US" altLang="ko-KR" sz="1600" spc="-50" dirty="0"/>
+            <a:r>
+              <a:rPr lang="ko-KR" altLang="en-US" sz="1600" spc="-50" dirty="0"/>
+              <a:t>그렇다면 기업의 진입과 탈퇴가 자유로운 장기에 있어서</a:t>
+            </a:r>
+            <a:r>
+              <a:rPr lang="en-US" altLang="ko-KR" sz="1600" spc="-50" dirty="0"/>
+              <a:t>, </a:t>
+            </a:r>
+            <a:r>
+              <a:rPr lang="ko-KR" altLang="en-US" sz="1600" spc="-50" dirty="0"/>
+              <a:t>저감보조금과 배출부과금 사이의 대칭성은 성립하지 않나</a:t>
+            </a:r>
+            <a:r>
+              <a:rPr lang="en-US" altLang="ko-KR" sz="1600" spc="-50" dirty="0"/>
+              <a:t>?</a:t>
+            </a:r>
+          </a:p>
+          <a:p>
+            <a:pPr marL="1292225" lvl="2" indent="-285750">
+              <a:lnSpc>
+                <a:spcPct val="150000"/>
+              </a:lnSpc>
+              <a:buFont typeface="Wingdings" panose="05000000000000000000" pitchFamily="2" charset="2"/>
+              <a:buChar char="Ø"/>
+            </a:pPr>
+            <a:r>
+              <a:rPr lang="ko-KR" altLang="en-US" sz="1600" spc="-50" dirty="0"/>
+              <a:t>아래의 조건</a:t>
+            </a:r>
+            <a:r>
+              <a:rPr lang="en-US" altLang="ko-KR" sz="1600" spc="-50" dirty="0"/>
+              <a:t>(</a:t>
+            </a:r>
+            <a:r>
+              <a:rPr lang="ko-KR" altLang="en-US" sz="1600" spc="-50" dirty="0"/>
+              <a:t>장기에서의 대칭성 조건</a:t>
+            </a:r>
+            <a:r>
+              <a:rPr lang="en-US" altLang="ko-KR" sz="1600" spc="-50" dirty="0"/>
+              <a:t>)</a:t>
+            </a:r>
+            <a:r>
+              <a:rPr lang="ko-KR" altLang="en-US" sz="1600" spc="-50" dirty="0"/>
+              <a:t>들이 만족되면</a:t>
+            </a:r>
+            <a:r>
+              <a:rPr lang="en-US" altLang="ko-KR" sz="1600" spc="-50" dirty="0"/>
+              <a:t>, </a:t>
+            </a:r>
+            <a:r>
+              <a:rPr lang="ko-KR" altLang="en-US" sz="1600" spc="-50" dirty="0"/>
+              <a:t>대칭성은 성립한다</a:t>
+            </a:r>
+            <a:r>
+              <a:rPr lang="en-US" altLang="ko-KR" sz="1600" spc="-50" dirty="0"/>
+              <a:t>.</a:t>
+            </a:r>
           </a:p>
           <a:p>
             <a:pPr>
@@ -12669,8 +12736,8 @@
           </a:p>
         </p:txBody>
       </p:sp>
-      <mc:AlternateContent xmlns:mc="http://schemas.openxmlformats.org/markup-compatibility/2006" xmlns:a14="http://schemas.microsoft.com/office/drawing/2010/main">
-        <mc:Choice Requires="a14">
+      <mc:AlternateContent xmlns:mc="http://schemas.openxmlformats.org/markup-compatibility/2006">
+        <mc:Choice xmlns:a14="http://schemas.microsoft.com/office/drawing/2010/main" Requires="a14">
           <p:sp>
             <p:nvSpPr>
               <p:cNvPr id="6" name="TextBox 5">
@@ -12685,8 +12752,8 @@
             </p:nvSpPr>
             <p:spPr>
               <a:xfrm>
-                <a:off x="678873" y="958844"/>
-                <a:ext cx="6629977" cy="4150945"/>
+                <a:off x="393531" y="958844"/>
+                <a:ext cx="6804937" cy="5634491"/>
               </a:xfrm>
               <a:prstGeom prst="rect">
                 <a:avLst/>
@@ -12961,9 +13028,22 @@
                   <a:rPr lang="en-US" altLang="ko-KR" sz="1600" spc="-50" dirty="0"/>
                   <a:t> </a:t>
                 </a:r>
-                <a:r>
-                  <a:rPr lang="ko-KR" altLang="en-US" sz="1600" spc="-50" dirty="0"/>
-                  <a:t>이는 오른쪽 그래프의 </a:t>
+                <a14:m>
+                  <m:oMath xmlns:m="http://schemas.openxmlformats.org/officeDocument/2006/math">
+                    <m:r>
+                      <m:rPr>
+                        <m:sty m:val="p"/>
+                      </m:rPr>
+                      <a:rPr lang="en-US" altLang="ko-KR" sz="1600" spc="-50">
+                        <a:latin typeface="Cambria Math" panose="02040503050406030204" pitchFamily="18" charset="0"/>
+                      </a:rPr>
+                      <m:t>s</m:t>
+                    </m:r>
+                  </m:oMath>
+                </a14:m>
+                <a:r>
+                  <a:rPr lang="ko-KR" altLang="en-US" sz="1600" spc="-50" dirty="0"/>
+                  <a:t>는 오른쪽 그래프의 </a:t>
                 </a:r>
                 <a14:m>
                   <m:oMath xmlns:m="http://schemas.openxmlformats.org/officeDocument/2006/math">
@@ -13176,10 +13256,146 @@
                 </a:r>
                 <a:endParaRPr lang="en-US" altLang="ko-KR" sz="1600" spc="-50" dirty="0"/>
               </a:p>
+              <a:p>
+                <a:pPr marL="1292225" lvl="2" indent="-285750">
+                  <a:lnSpc>
+                    <a:spcPct val="150000"/>
+                  </a:lnSpc>
+                  <a:buFont typeface="Wingdings" panose="05000000000000000000" pitchFamily="2" charset="2"/>
+                  <a:buChar char="Ø"/>
+                </a:pPr>
+                <a:r>
+                  <a:rPr lang="ko-KR" altLang="en-US" sz="1600" spc="-50" dirty="0"/>
+                  <a:t>배출상한을 구매하는 기업은 단위당 </a:t>
+                </a:r>
+                <a14:m>
+                  <m:oMath xmlns:m="http://schemas.openxmlformats.org/officeDocument/2006/math">
+                    <m:r>
+                      <m:rPr>
+                        <m:sty m:val="p"/>
+                      </m:rPr>
+                      <a:rPr lang="en-US" altLang="ko-KR" sz="1600" spc="-50">
+                        <a:latin typeface="Cambria Math" panose="02040503050406030204" pitchFamily="18" charset="0"/>
+                      </a:rPr>
+                      <m:t>s</m:t>
+                    </m:r>
+                  </m:oMath>
+                </a14:m>
+                <a:r>
+                  <a:rPr lang="en-US" altLang="ko-KR" sz="1600" spc="-50" dirty="0"/>
+                  <a:t> </a:t>
+                </a:r>
+                <a:r>
+                  <a:rPr lang="ko-KR" altLang="en-US" sz="1600" spc="-50" dirty="0"/>
+                  <a:t>이상의 가격을 지불할 이유가 없다</a:t>
+                </a:r>
+                <a:r>
+                  <a:rPr lang="en-US" altLang="ko-KR" sz="1600" spc="-50" dirty="0"/>
+                  <a:t>. (</a:t>
+                </a:r>
+                <a:r>
+                  <a:rPr lang="ko-KR" altLang="en-US" sz="1600" spc="-50" dirty="0"/>
+                  <a:t>정부에 단위당 </a:t>
+                </a:r>
+                <a14:m>
+                  <m:oMath xmlns:m="http://schemas.openxmlformats.org/officeDocument/2006/math">
+                    <m:r>
+                      <m:rPr>
+                        <m:sty m:val="p"/>
+                      </m:rPr>
+                      <a:rPr lang="en-US" altLang="ko-KR" sz="1600" spc="-50">
+                        <a:latin typeface="Cambria Math" panose="02040503050406030204" pitchFamily="18" charset="0"/>
+                      </a:rPr>
+                      <m:t>s</m:t>
+                    </m:r>
+                  </m:oMath>
+                </a14:m>
+                <a:r>
+                  <a:rPr lang="ko-KR" altLang="en-US" sz="1600" spc="-50" dirty="0"/>
+                  <a:t>를 납부하는 편이 낫다</a:t>
+                </a:r>
+                <a:r>
+                  <a:rPr lang="en-US" altLang="ko-KR" sz="1600" spc="-50" dirty="0"/>
+                  <a:t>.)</a:t>
+                </a:r>
+              </a:p>
+              <a:p>
+                <a:pPr marL="1292225" lvl="2" indent="-285750">
+                  <a:lnSpc>
+                    <a:spcPct val="150000"/>
+                  </a:lnSpc>
+                  <a:buFont typeface="Wingdings" panose="05000000000000000000" pitchFamily="2" charset="2"/>
+                  <a:buChar char="Ø"/>
+                </a:pPr>
+                <a:r>
+                  <a:rPr lang="ko-KR" altLang="en-US" sz="1600" spc="-50" dirty="0"/>
+                  <a:t>배출상한을 판매하는 기업도 단위당 </a:t>
+                </a:r>
+                <a14:m>
+                  <m:oMath xmlns:m="http://schemas.openxmlformats.org/officeDocument/2006/math">
+                    <m:r>
+                      <m:rPr>
+                        <m:sty m:val="p"/>
+                      </m:rPr>
+                      <a:rPr lang="en-US" altLang="ko-KR" sz="1600" spc="-50">
+                        <a:latin typeface="Cambria Math" panose="02040503050406030204" pitchFamily="18" charset="0"/>
+                      </a:rPr>
+                      <m:t>s</m:t>
+                    </m:r>
+                  </m:oMath>
+                </a14:m>
+                <a:r>
+                  <a:rPr lang="en-US" altLang="ko-KR" sz="1600" spc="-50" dirty="0"/>
+                  <a:t> </a:t>
+                </a:r>
+                <a:r>
+                  <a:rPr lang="ko-KR" altLang="en-US" sz="1600" spc="-50" dirty="0"/>
+                  <a:t>이하의 가격을 받을 이유가 없다</a:t>
+                </a:r>
+                <a:r>
+                  <a:rPr lang="en-US" altLang="ko-KR" sz="1600" spc="-50" dirty="0"/>
+                  <a:t>. (</a:t>
+                </a:r>
+                <a:r>
+                  <a:rPr lang="ko-KR" altLang="en-US" sz="1600" spc="-50" dirty="0"/>
+                  <a:t>정부로부터 단위당 </a:t>
+                </a:r>
+                <a14:m>
+                  <m:oMath xmlns:m="http://schemas.openxmlformats.org/officeDocument/2006/math">
+                    <m:r>
+                      <m:rPr>
+                        <m:sty m:val="p"/>
+                      </m:rPr>
+                      <a:rPr lang="en-US" altLang="ko-KR" sz="1600" spc="-50">
+                        <a:latin typeface="Cambria Math" panose="02040503050406030204" pitchFamily="18" charset="0"/>
+                      </a:rPr>
+                      <m:t>s</m:t>
+                    </m:r>
+                    <m:r>
+                      <a:rPr lang="ko-KR" altLang="en-US" sz="1600" i="1" spc="-50">
+                        <a:latin typeface="Cambria Math" panose="02040503050406030204" pitchFamily="18" charset="0"/>
+                      </a:rPr>
+                      <m:t>의</m:t>
+                    </m:r>
+                  </m:oMath>
+                </a14:m>
+                <a:r>
+                  <a:rPr lang="en-US" altLang="ko-KR" sz="1600" spc="-50" dirty="0"/>
+                  <a:t> </a:t>
+                </a:r>
+                <a:r>
+                  <a:rPr lang="ko-KR" altLang="en-US" sz="1600" spc="-50" dirty="0"/>
+                  <a:t>보조금을 받는 게 낫다</a:t>
+                </a:r>
+                <a:r>
+                  <a:rPr lang="en-US" altLang="ko-KR" sz="1600" spc="-50" dirty="0"/>
+                  <a:t>)</a:t>
+                </a:r>
+              </a:p>
             </p:txBody>
           </p:sp>
         </mc:Choice>
-        <mc:Fallback xmlns="">
+        <mc:Fallback>
           <p:sp>
             <p:nvSpPr>
               <p:cNvPr id="6" name="TextBox 5">
@@ -13196,8 +13412,8 @@
             </p:nvSpPr>
             <p:spPr>
               <a:xfrm>
-                <a:off x="678873" y="958844"/>
-                <a:ext cx="6629977" cy="4150945"/>
+                <a:off x="393531" y="958844"/>
+                <a:ext cx="6804937" cy="5634491"/>
               </a:xfrm>
               <a:prstGeom prst="rect">
                 <a:avLst/>
@@ -13205,7 +13421,7 @@
               <a:blipFill>
                 <a:blip r:embed="rId3"/>
                 <a:stretch>
-                  <a:fillRect l="-460" b="-881"/>
+                  <a:fillRect l="-538" r="-358" b="-324"/>
                 </a:stretch>
               </a:blipFill>
             </p:spPr>
@@ -13511,8 +13727,8 @@
           </a:p>
         </p:txBody>
       </p:sp>
-      <mc:AlternateContent xmlns:mc="http://schemas.openxmlformats.org/markup-compatibility/2006" xmlns:a14="http://schemas.microsoft.com/office/drawing/2010/main">
-        <mc:Choice Requires="a14">
+      <mc:AlternateContent xmlns:mc="http://schemas.openxmlformats.org/markup-compatibility/2006">
+        <mc:Choice xmlns:a14="http://schemas.microsoft.com/office/drawing/2010/main" Requires="a14">
           <p:sp>
             <p:nvSpPr>
               <p:cNvPr id="6" name="TextBox 5">
@@ -13528,7 +13744,7 @@
             <p:spPr>
               <a:xfrm>
                 <a:off x="678873" y="958844"/>
-                <a:ext cx="11252777" cy="5684057"/>
+                <a:ext cx="11252777" cy="5314725"/>
               </a:xfrm>
               <a:prstGeom prst="rect">
                 <a:avLst/>
@@ -13577,7 +13793,23 @@
                 </a:pPr>
                 <a:r>
                   <a:rPr lang="ko-KR" altLang="en-US" sz="1600" spc="-50" dirty="0"/>
-                  <a:t>배출부과금과 저감보조금이 같다는 사실을 확인해보자</a:t>
+                  <a:t>이와 같은 상황에서</a:t>
+                </a:r>
+                <a:r>
+                  <a:rPr lang="en-US" altLang="ko-KR" sz="1600" spc="-50" dirty="0"/>
+                  <a:t>, </a:t>
+                </a:r>
+                <a:r>
+                  <a:rPr lang="ko-KR" altLang="en-US" sz="1600" spc="-50" dirty="0"/>
+                  <a:t>기업의 진입이 자유로운 장기에서도</a:t>
+                </a:r>
+                <a:r>
+                  <a:rPr lang="en-US" altLang="ko-KR" sz="1600" spc="-50" dirty="0"/>
+                  <a:t>, </a:t>
+                </a:r>
+                <a:r>
+                  <a:rPr lang="ko-KR" altLang="en-US" sz="1600" spc="-50" dirty="0"/>
+                  <a:t>배출부과금과 저감보조금이 유도하는 배출량은 같다는 사실을 확인해보자</a:t>
                 </a:r>
                 <a:endParaRPr lang="en-US" altLang="ko-KR" sz="1600" spc="-50" dirty="0"/>
               </a:p>
@@ -13700,16 +13932,6 @@
                   <a:rPr lang="ko-KR" altLang="en-US" sz="1600" spc="-50" dirty="0"/>
                   <a:t>이 기업이 산업을 떠나지 않고 생산함으로 인해 부담하는 총 기회비용은 아래와 같음</a:t>
                 </a:r>
-                <a:endParaRPr lang="en-US" altLang="ko-KR" sz="1600" spc="-50" dirty="0"/>
-              </a:p>
-              <a:p>
-                <a:pPr marL="377825" indent="-285750">
-                  <a:lnSpc>
-                    <a:spcPct val="150000"/>
-                  </a:lnSpc>
-                  <a:buFont typeface="Arial" panose="020B0604020202020204" pitchFamily="34" charset="0"/>
-                  <a:buChar char="•"/>
-                </a:pPr>
                 <a:endParaRPr lang="en-US" altLang="ko-KR" sz="1600" spc="-50" dirty="0"/>
               </a:p>
               <a:p>
@@ -14158,16 +14380,6 @@
                 <a:endParaRPr lang="en-US" altLang="ko-KR" sz="1600" spc="-50" dirty="0"/>
               </a:p>
               <a:p>
-                <a:pPr marL="835025" lvl="1" indent="-285750">
-                  <a:lnSpc>
-                    <a:spcPct val="150000"/>
-                  </a:lnSpc>
-                  <a:buFont typeface="Wingdings" panose="05000000000000000000" pitchFamily="2" charset="2"/>
-                  <a:buChar char="ü"/>
-                </a:pPr>
-                <a:endParaRPr lang="en-US" altLang="ko-KR" sz="1600" spc="-50" dirty="0"/>
-              </a:p>
-              <a:p>
                 <a:pPr marL="377825" indent="-285750">
                   <a:lnSpc>
                     <a:spcPct val="150000"/>
@@ -14530,7 +14742,7 @@
             </p:txBody>
           </p:sp>
         </mc:Choice>
-        <mc:Fallback xmlns="">
+        <mc:Fallback>
           <p:sp>
             <p:nvSpPr>
               <p:cNvPr id="6" name="TextBox 5">
@@ -14548,7 +14760,7 @@
             <p:spPr>
               <a:xfrm>
                 <a:off x="678873" y="958844"/>
-                <a:ext cx="11252777" cy="5684057"/>
+                <a:ext cx="11252777" cy="5314725"/>
               </a:xfrm>
               <a:prstGeom prst="rect">
                 <a:avLst/>
@@ -14556,7 +14768,7 @@
               <a:blipFill>
                 <a:blip r:embed="rId2"/>
                 <a:stretch>
-                  <a:fillRect l="-271" r="-271" b="-322"/>
+                  <a:fillRect l="-271" r="-271" b="-459"/>
                 </a:stretch>
               </a:blipFill>
             </p:spPr>
@@ -14693,8 +14905,8 @@
           </a:p>
         </p:txBody>
       </p:sp>
-      <mc:AlternateContent xmlns:mc="http://schemas.openxmlformats.org/markup-compatibility/2006" xmlns:a14="http://schemas.microsoft.com/office/drawing/2010/main">
-        <mc:Choice Requires="a14">
+      <mc:AlternateContent xmlns:mc="http://schemas.openxmlformats.org/markup-compatibility/2006">
+        <mc:Choice xmlns:a14="http://schemas.microsoft.com/office/drawing/2010/main" Requires="a14">
           <p:sp>
             <p:nvSpPr>
               <p:cNvPr id="8" name="TextBox 7">
@@ -14798,9 +15010,28 @@
                 </a:r>
                 <a:r>
                   <a:rPr lang="ko-KR" altLang="en-US" sz="1600" spc="-50" dirty="0"/>
-                  <a:t>상품가격은 변하지 않음</a:t>
-                </a:r>
-                <a:endParaRPr lang="en-US" altLang="ko-KR" sz="1600" spc="-50" dirty="0"/>
+                  <a:t>상품가격은 변하지 않음 </a:t>
+                </a:r>
+                <a:r>
+                  <a:rPr lang="en-US" altLang="ko-KR" sz="1600" spc="-50" dirty="0"/>
+                  <a:t>(</a:t>
+                </a:r>
+                <a:r>
+                  <a:rPr lang="ko-KR" altLang="en-US" sz="1600" spc="-50" dirty="0"/>
+                  <a:t>예</a:t>
+                </a:r>
+                <a:r>
+                  <a:rPr lang="en-US" altLang="ko-KR" sz="1600" spc="-50" dirty="0"/>
+                  <a:t>: </a:t>
+                </a:r>
+                <a:r>
+                  <a:rPr lang="ko-KR" altLang="en-US" sz="1600" spc="-50" dirty="0"/>
+                  <a:t>주민세</a:t>
+                </a:r>
+                <a:r>
+                  <a:rPr lang="en-US" altLang="ko-KR" sz="1600" spc="-50" dirty="0"/>
+                  <a:t>)</a:t>
+                </a:r>
               </a:p>
               <a:p>
                 <a:pPr marL="377825" indent="-285750">
@@ -14842,7 +15073,27 @@
                 </a:r>
                 <a:r>
                   <a:rPr lang="ko-KR" altLang="en-US" sz="1600" spc="-50" dirty="0"/>
-                  <a:t>상품가격은 변함</a:t>
+                  <a:t>상품가격은 변함 </a:t>
+                </a:r>
+                <a:r>
+                  <a:rPr lang="en-US" altLang="ko-KR" sz="1600" spc="-50" dirty="0"/>
+                  <a:t>(</a:t>
+                </a:r>
+                <a:r>
+                  <a:rPr lang="ko-KR" altLang="en-US" sz="1600" spc="-50" dirty="0"/>
+                  <a:t>예</a:t>
+                </a:r>
+                <a:r>
+                  <a:rPr lang="en-US" altLang="ko-KR" sz="1600" spc="-50" dirty="0"/>
+                  <a:t>: </a:t>
+                </a:r>
+                <a:r>
+                  <a:rPr lang="ko-KR" altLang="en-US" sz="1600" spc="-50" dirty="0" err="1"/>
+                  <a:t>유류세</a:t>
+                </a:r>
+                <a:r>
+                  <a:rPr lang="en-US" altLang="ko-KR" sz="1600" spc="-50"/>
+                  <a:t>)</a:t>
                 </a:r>
                 <a:endParaRPr lang="en-US" altLang="ko-KR" sz="1600" spc="-50" dirty="0"/>
               </a:p>
@@ -15244,7 +15495,7 @@
             </p:txBody>
           </p:sp>
         </mc:Choice>
-        <mc:Fallback xmlns="">
+        <mc:Fallback>
           <p:sp>
             <p:nvSpPr>
               <p:cNvPr id="8" name="TextBox 7">
